--- a/python-course-ppt/逐节课件/Python讲授课件-单元00.pptx
+++ b/python-course-ppt/逐节课件/Python讲授课件-单元00.pptx
@@ -238,1278 +238,6 @@
 </p:notesMaster>
 </file>
 
-<file path=ppt/notesSlides/notesSlide1.xml><?xml version="1.0" encoding="utf-8"?>
-<p:notes xmlns:a="http://schemas.openxmlformats.org/drawingml/2006/main" xmlns:p="http://schemas.openxmlformats.org/presentationml/2006/main" xmlns:r="http://schemas.openxmlformats.org/officeDocument/2006/relationships">
-  <p:cSld>
-    <p:spTree>
-      <p:nvGrpSpPr>
-        <p:cNvPr id="1" name=""/>
-        <p:cNvGrpSpPr/>
-        <p:nvPr/>
-      </p:nvGrpSpPr>
-      <p:grpSpPr>
-        <a:xfrm>
-          <a:off x="0" y="0"/>
-          <a:ext cx="0" cy="0"/>
-          <a:chOff x="0" y="0"/>
-          <a:chExt cx="0" cy="0"/>
-        </a:xfrm>
-      </p:grpSpPr>
-      <p:sp>
-        <p:nvSpPr>
-          <p:cNvPr id="2" name="讲课提示"/>
-          <p:cNvSpPr txBox="1"/>
-          <p:nvPr/>
-        </p:nvSpPr>
-        <p:spPr>
-          <a:xfrm>
-            <a:off x="457200" y="457200"/>
-            <a:ext cx="6858000" cy="4800600"/>
-          </a:xfrm>
-          <a:prstGeom prst="rect">
-            <a:avLst/>
-          </a:prstGeom>
-        </p:spPr>
-        <p:txBody>
-          <a:bodyPr wrap="square"/>
-          <a:lstStyle/>
-          <a:p>
-            <a:r>
-              <a:rPr lang="zh-CN" dirty="0"/>
-              <a:t>单元 0 · 单元 0 · 环境与工具链</a:t>
-            </a:r>
-          </a:p>
-          <a:p>
-            <a:r>
-              <a:rPr lang="zh-CN" dirty="0"/>
-              <a:t/>
-            </a:r>
-          </a:p>
-          <a:p>
-            <a:r>
-              <a:rPr lang="zh-CN" dirty="0"/>
-              <a:t>本单元包含以下课节：</a:t>
-            </a:r>
-          </a:p>
-          <a:p>
-            <a:r>
-              <a:rPr lang="zh-CN" dirty="0"/>
-              <a:t>· 第 1 节 装好 Python 与 VS Code</a:t>
-            </a:r>
-          </a:p>
-          <a:p>
-            <a:r>
-              <a:rPr lang="zh-CN" dirty="0"/>
-              <a:t>· 第 2 节 第一个报错与 Git 拍快照</a:t>
-            </a:r>
-          </a:p>
-          <a:p>
-            <a:r>
-              <a:rPr lang="zh-CN" dirty="0"/>
-              <a:t>· 第 3 节 目录结构、print 与注释</a:t>
-            </a:r>
-          </a:p>
-          <a:p>
-            <a:r>
-              <a:rPr lang="zh-CN" dirty="0"/>
-              <a:t>· 第 4 节 动手实战与答案讲评</a:t>
-            </a:r>
-          </a:p>
-          <a:p>
-            <a:r>
-              <a:rPr lang="zh-CN" dirty="0"/>
-              <a:t>· 第 5 节 单元 0 验收复盘</a:t>
-            </a:r>
-          </a:p>
-          <a:p>
-            <a:r>
-              <a:rPr lang="zh-CN" dirty="0"/>
-              <a:t/>
-            </a:r>
-          </a:p>
-          <a:p>
-            <a:r>
-              <a:rPr lang="zh-CN" dirty="0"/>
-              <a:t>开场用 3 分钟讲清：这个单元学完能做出什么，最后会被关卡怎么验。</a:t>
-            </a:r>
-          </a:p>
-        </p:txBody>
-      </p:sp>
-    </p:spTree>
-  </p:cSld>
-  <p:clrMapOvr>
-    <a:masterClrMapping/>
-  </p:clrMapOvr>
-</p:notes>
-</file>
-
-<file path=ppt/notesSlides/notesSlide10.xml><?xml version="1.0" encoding="utf-8"?>
-<p:notes xmlns:a="http://schemas.openxmlformats.org/drawingml/2006/main" xmlns:p="http://schemas.openxmlformats.org/presentationml/2006/main" xmlns:r="http://schemas.openxmlformats.org/officeDocument/2006/relationships">
-  <p:cSld>
-    <p:spTree>
-      <p:nvGrpSpPr>
-        <p:cNvPr id="1" name=""/>
-        <p:cNvGrpSpPr/>
-        <p:nvPr/>
-      </p:nvGrpSpPr>
-      <p:grpSpPr>
-        <a:xfrm>
-          <a:off x="0" y="0"/>
-          <a:ext cx="0" cy="0"/>
-          <a:chOff x="0" y="0"/>
-          <a:chExt cx="0" cy="0"/>
-        </a:xfrm>
-      </p:grpSpPr>
-      <p:sp>
-        <p:nvSpPr>
-          <p:cNvPr id="2" name="讲课提示"/>
-          <p:cNvSpPr txBox="1"/>
-          <p:nvPr/>
-        </p:nvSpPr>
-        <p:spPr>
-          <a:xfrm>
-            <a:off x="457200" y="457200"/>
-            <a:ext cx="6858000" cy="4800600"/>
-          </a:xfrm>
-          <a:prstGeom prst="rect">
-            <a:avLst/>
-          </a:prstGeom>
-        </p:spPr>
-        <p:txBody>
-          <a:bodyPr wrap="square"/>
-          <a:lstStyle/>
-          <a:p>
-            <a:r>
-              <a:rPr lang="zh-CN" dirty="0"/>
-              <a:t>第 5 节 · 单元 0 验收复盘</a:t>
-            </a:r>
-          </a:p>
-          <a:p>
-            <a:r>
-              <a:rPr lang="zh-CN" dirty="0"/>
-              <a:t>单元 0 · 环境与工具链 · W0</a:t>
-            </a:r>
-          </a:p>
-          <a:p>
-            <a:r>
-              <a:rPr lang="zh-CN" dirty="0"/>
-              <a:t/>
-            </a:r>
-          </a:p>
-          <a:p>
-            <a:r>
-              <a:rPr lang="zh-CN" dirty="0"/>
-              <a:t>学习目标：确认环境、终端、Git、目录结构四项都掌握</a:t>
-            </a:r>
-          </a:p>
-          <a:p>
-            <a:r>
-              <a:rPr lang="zh-CN" dirty="0"/>
-              <a:t/>
-            </a:r>
-          </a:p>
-          <a:p>
-            <a:r>
-              <a:rPr lang="zh-CN" dirty="0"/>
-              <a:t>课堂实操（40 分钟，不看答案）：</a:t>
-            </a:r>
-          </a:p>
-          <a:p>
-            <a:r>
-              <a:rPr lang="zh-CN" dirty="0"/>
-              <a:t>· 逐条打勾验收自测</a:t>
-            </a:r>
-          </a:p>
-          <a:p>
-            <a:r>
-              <a:rPr lang="zh-CN" dirty="0"/>
-              <a:t>· 把没过的项写成补齐计划</a:t>
-            </a:r>
-          </a:p>
-          <a:p>
-            <a:r>
-              <a:rPr lang="zh-CN" dirty="0"/>
-              <a:t/>
-            </a:r>
-          </a:p>
-          <a:p>
-            <a:r>
-              <a:rPr lang="zh-CN" dirty="0"/>
-              <a:t>课后作业：</a:t>
-            </a:r>
-          </a:p>
-          <a:p>
-            <a:r>
-              <a:rPr lang="zh-CN" dirty="0"/>
-              <a:t>· 完成本单元小结与产出检查</a:t>
-            </a:r>
-          </a:p>
-          <a:p>
-            <a:r>
-              <a:rPr lang="zh-CN" dirty="0"/>
-              <a:t/>
-            </a:r>
-          </a:p>
-          <a:p>
-            <a:r>
-              <a:rPr lang="zh-CN" dirty="0"/>
-              <a:t>节奏：讲 20 分钟 → 学员自己敲 40 分钟（不看答案）→ 对讲评自查 20 分钟 → 写作业 10 分钟。</a:t>
-            </a:r>
-          </a:p>
-        </p:txBody>
-      </p:sp>
-    </p:spTree>
-  </p:cSld>
-  <p:clrMapOvr>
-    <a:masterClrMapping/>
-  </p:clrMapOvr>
-</p:notes>
-</file>
-
-<file path=ppt/notesSlides/notesSlide11.xml><?xml version="1.0" encoding="utf-8"?>
-<p:notes xmlns:a="http://schemas.openxmlformats.org/drawingml/2006/main" xmlns:p="http://schemas.openxmlformats.org/presentationml/2006/main" xmlns:r="http://schemas.openxmlformats.org/officeDocument/2006/relationships">
-  <p:cSld>
-    <p:spTree>
-      <p:nvGrpSpPr>
-        <p:cNvPr id="1" name=""/>
-        <p:cNvGrpSpPr/>
-        <p:nvPr/>
-      </p:nvGrpSpPr>
-      <p:grpSpPr>
-        <a:xfrm>
-          <a:off x="0" y="0"/>
-          <a:ext cx="0" cy="0"/>
-          <a:chOff x="0" y="0"/>
-          <a:chExt cx="0" cy="0"/>
-        </a:xfrm>
-      </p:grpSpPr>
-      <p:sp>
-        <p:nvSpPr>
-          <p:cNvPr id="2" name="讲课提示"/>
-          <p:cNvSpPr txBox="1"/>
-          <p:nvPr/>
-        </p:nvSpPr>
-        <p:spPr>
-          <a:xfrm>
-            <a:off x="457200" y="457200"/>
-            <a:ext cx="6858000" cy="4800600"/>
-          </a:xfrm>
-          <a:prstGeom prst="rect">
-            <a:avLst/>
-          </a:prstGeom>
-        </p:spPr>
-        <p:txBody>
-          <a:bodyPr wrap="square"/>
-          <a:lstStyle/>
-          <a:p>
-            <a:r>
-              <a:rPr lang="zh-CN" dirty="0"/>
-              <a:t>第 5 节 · 核心知识点：单元 0 验收复盘</a:t>
-            </a:r>
-          </a:p>
-          <a:p>
-            <a:r>
-              <a:rPr lang="zh-CN" dirty="0"/>
-              <a:t/>
-            </a:r>
-          </a:p>
-          <a:p>
-            <a:r>
-              <a:rPr lang="zh-CN" dirty="0"/>
-              <a:t>讲这一页时：先让学生说出上节课的结论，再逐块讲要点。</a:t>
-            </a:r>
-          </a:p>
-          <a:p>
-            <a:r>
-              <a:rPr lang="zh-CN" dirty="0"/>
-              <a:t>每讲完一块，问一句「这一步如果写错了，报错会长什么样？」——把错误提前讲。</a:t>
-            </a:r>
-          </a:p>
-          <a:p>
-            <a:r>
-              <a:rPr lang="zh-CN" dirty="0"/>
-              <a:t/>
-            </a:r>
-          </a:p>
-          <a:p>
-            <a:r>
-              <a:rPr lang="zh-CN" dirty="0"/>
-              <a:t>本节目标：确认环境、终端、Git、目录结构四项都掌握</a:t>
-            </a:r>
-          </a:p>
-          <a:p>
-            <a:r>
-              <a:rPr lang="zh-CN" dirty="0"/>
-              <a:t/>
-            </a:r>
-          </a:p>
-          <a:p>
-            <a:r>
-              <a:rPr lang="zh-CN" dirty="0"/>
-              <a:t>看不到懂的地方，回讲义对应小节读一遍，再回来对着这页复述一次——能讲出来才算真懂。</a:t>
-            </a:r>
-          </a:p>
-        </p:txBody>
-      </p:sp>
-    </p:spTree>
-  </p:cSld>
-  <p:clrMapOvr>
-    <a:masterClrMapping/>
-  </p:clrMapOvr>
-</p:notes>
-</file>
-
-<file path=ppt/notesSlides/notesSlide12.xml><?xml version="1.0" encoding="utf-8"?>
-<p:notes xmlns:a="http://schemas.openxmlformats.org/drawingml/2006/main" xmlns:p="http://schemas.openxmlformats.org/presentationml/2006/main" xmlns:r="http://schemas.openxmlformats.org/officeDocument/2006/relationships">
-  <p:cSld>
-    <p:spTree>
-      <p:nvGrpSpPr>
-        <p:cNvPr id="1" name=""/>
-        <p:cNvGrpSpPr/>
-        <p:nvPr/>
-      </p:nvGrpSpPr>
-      <p:grpSpPr>
-        <a:xfrm>
-          <a:off x="0" y="0"/>
-          <a:ext cx="0" cy="0"/>
-          <a:chOff x="0" y="0"/>
-          <a:chExt cx="0" cy="0"/>
-        </a:xfrm>
-      </p:grpSpPr>
-      <p:sp>
-        <p:nvSpPr>
-          <p:cNvPr id="2" name="讲课提示"/>
-          <p:cNvSpPr txBox="1"/>
-          <p:nvPr/>
-        </p:nvSpPr>
-        <p:spPr>
-          <a:xfrm>
-            <a:off x="457200" y="457200"/>
-            <a:ext cx="6858000" cy="4800600"/>
-          </a:xfrm>
-          <a:prstGeom prst="rect">
-            <a:avLst/>
-          </a:prstGeom>
-        </p:spPr>
-        <p:txBody>
-          <a:bodyPr wrap="square"/>
-          <a:lstStyle/>
-          <a:p>
-            <a:r>
-              <a:rPr lang="zh-CN" dirty="0"/>
-              <a:t>单元 0 小结 · 单元 0 · 小结</a:t>
-            </a:r>
-          </a:p>
-          <a:p>
-            <a:r>
-              <a:rPr lang="zh-CN" dirty="0"/>
-              <a:t/>
-            </a:r>
-          </a:p>
-          <a:p>
-            <a:r>
-              <a:rPr lang="zh-CN" dirty="0"/>
-              <a:t>收尾动作：让学生合上讲义，口述本单元三个最重要的结论；说不出来的，回对应课节。</a:t>
-            </a:r>
-          </a:p>
-          <a:p>
-            <a:r>
-              <a:rPr lang="zh-CN" dirty="0"/>
-              <a:t>然后当场勾一遍本单元课节的「已完成」，没打勾的进下一单元前补掉。</a:t>
-            </a:r>
-          </a:p>
-        </p:txBody>
-      </p:sp>
-    </p:spTree>
-  </p:cSld>
-  <p:clrMapOvr>
-    <a:masterClrMapping/>
-  </p:clrMapOvr>
-</p:notes>
-</file>
-
-<file path=ppt/notesSlides/notesSlide2.xml><?xml version="1.0" encoding="utf-8"?>
-<p:notes xmlns:a="http://schemas.openxmlformats.org/drawingml/2006/main" xmlns:p="http://schemas.openxmlformats.org/presentationml/2006/main" xmlns:r="http://schemas.openxmlformats.org/officeDocument/2006/relationships">
-  <p:cSld>
-    <p:spTree>
-      <p:nvGrpSpPr>
-        <p:cNvPr id="1" name=""/>
-        <p:cNvGrpSpPr/>
-        <p:nvPr/>
-      </p:nvGrpSpPr>
-      <p:grpSpPr>
-        <a:xfrm>
-          <a:off x="0" y="0"/>
-          <a:ext cx="0" cy="0"/>
-          <a:chOff x="0" y="0"/>
-          <a:chExt cx="0" cy="0"/>
-        </a:xfrm>
-      </p:grpSpPr>
-      <p:sp>
-        <p:nvSpPr>
-          <p:cNvPr id="2" name="讲课提示"/>
-          <p:cNvSpPr txBox="1"/>
-          <p:nvPr/>
-        </p:nvSpPr>
-        <p:spPr>
-          <a:xfrm>
-            <a:off x="457200" y="457200"/>
-            <a:ext cx="6858000" cy="4800600"/>
-          </a:xfrm>
-          <a:prstGeom prst="rect">
-            <a:avLst/>
-          </a:prstGeom>
-        </p:spPr>
-        <p:txBody>
-          <a:bodyPr wrap="square"/>
-          <a:lstStyle/>
-          <a:p>
-            <a:r>
-              <a:rPr lang="zh-CN" dirty="0"/>
-              <a:t>第 1 节 · 装好 Python 与 VS Code</a:t>
-            </a:r>
-          </a:p>
-          <a:p>
-            <a:r>
-              <a:rPr lang="zh-CN" dirty="0"/>
-              <a:t>单元 0 · 环境与工具链 · W0</a:t>
-            </a:r>
-          </a:p>
-          <a:p>
-            <a:r>
-              <a:rPr lang="zh-CN" dirty="0"/>
-              <a:t/>
-            </a:r>
-          </a:p>
-          <a:p>
-            <a:r>
-              <a:rPr lang="zh-CN" dirty="0"/>
-              <a:t>学习目标：知道解释器是什么，能新建并运行第一个脚本</a:t>
-            </a:r>
-          </a:p>
-          <a:p>
-            <a:r>
-              <a:rPr lang="zh-CN" dirty="0"/>
-              <a:t/>
-            </a:r>
-          </a:p>
-          <a:p>
-            <a:r>
-              <a:rPr lang="zh-CN" dirty="0"/>
-              <a:t>课堂实操（40 分钟，不看答案）：</a:t>
-            </a:r>
-          </a:p>
-          <a:p>
-            <a:r>
-              <a:rPr lang="zh-CN" dirty="0"/>
-              <a:t>· 跟着敲：新建 hello.py 并运行</a:t>
-            </a:r>
-          </a:p>
-          <a:p>
-            <a:r>
-              <a:rPr lang="zh-CN" dirty="0"/>
-              <a:t>· 故意写错一次，观察报错长什么样</a:t>
-            </a:r>
-          </a:p>
-          <a:p>
-            <a:r>
-              <a:rPr lang="zh-CN" dirty="0"/>
-              <a:t>· 用终端直接运行 python hello.py</a:t>
-            </a:r>
-          </a:p>
-          <a:p>
-            <a:r>
-              <a:rPr lang="zh-CN" dirty="0"/>
-              <a:t/>
-            </a:r>
-          </a:p>
-          <a:p>
-            <a:r>
-              <a:rPr lang="zh-CN" dirty="0"/>
-              <a:t>课后作业：</a:t>
-            </a:r>
-          </a:p>
-          <a:p>
-            <a:r>
-              <a:rPr lang="zh-CN" dirty="0"/>
-              <a:t>· 装好环境并跑通 hello.py</a:t>
-            </a:r>
-          </a:p>
-          <a:p>
-            <a:r>
-              <a:rPr lang="zh-CN" dirty="0"/>
-              <a:t/>
-            </a:r>
-          </a:p>
-          <a:p>
-            <a:r>
-              <a:rPr lang="zh-CN" dirty="0"/>
-              <a:t>节奏：讲 20 分钟 → 学员自己敲 40 分钟（不看答案）→ 对讲评自查 20 分钟 → 写作业 10 分钟。</a:t>
-            </a:r>
-          </a:p>
-        </p:txBody>
-      </p:sp>
-    </p:spTree>
-  </p:cSld>
-  <p:clrMapOvr>
-    <a:masterClrMapping/>
-  </p:clrMapOvr>
-</p:notes>
-</file>
-
-<file path=ppt/notesSlides/notesSlide3.xml><?xml version="1.0" encoding="utf-8"?>
-<p:notes xmlns:a="http://schemas.openxmlformats.org/drawingml/2006/main" xmlns:p="http://schemas.openxmlformats.org/presentationml/2006/main" xmlns:r="http://schemas.openxmlformats.org/officeDocument/2006/relationships">
-  <p:cSld>
-    <p:spTree>
-      <p:nvGrpSpPr>
-        <p:cNvPr id="1" name=""/>
-        <p:cNvGrpSpPr/>
-        <p:nvPr/>
-      </p:nvGrpSpPr>
-      <p:grpSpPr>
-        <a:xfrm>
-          <a:off x="0" y="0"/>
-          <a:ext cx="0" cy="0"/>
-          <a:chOff x="0" y="0"/>
-          <a:chExt cx="0" cy="0"/>
-        </a:xfrm>
-      </p:grpSpPr>
-      <p:sp>
-        <p:nvSpPr>
-          <p:cNvPr id="2" name="讲课提示"/>
-          <p:cNvSpPr txBox="1"/>
-          <p:nvPr/>
-        </p:nvSpPr>
-        <p:spPr>
-          <a:xfrm>
-            <a:off x="457200" y="457200"/>
-            <a:ext cx="6858000" cy="4800600"/>
-          </a:xfrm>
-          <a:prstGeom prst="rect">
-            <a:avLst/>
-          </a:prstGeom>
-        </p:spPr>
-        <p:txBody>
-          <a:bodyPr wrap="square"/>
-          <a:lstStyle/>
-          <a:p>
-            <a:r>
-              <a:rPr lang="zh-CN" dirty="0"/>
-              <a:t>第 1 节 · 核心知识点：装好 Python 与 VS Code</a:t>
-            </a:r>
-          </a:p>
-          <a:p>
-            <a:r>
-              <a:rPr lang="zh-CN" dirty="0"/>
-              <a:t/>
-            </a:r>
-          </a:p>
-          <a:p>
-            <a:r>
-              <a:rPr lang="zh-CN" dirty="0"/>
-              <a:t>讲这一页时：先让学生说出上节课的结论，再逐块讲要点。</a:t>
-            </a:r>
-          </a:p>
-          <a:p>
-            <a:r>
-              <a:rPr lang="zh-CN" dirty="0"/>
-              <a:t>每讲完一块，问一句「这一步如果写错了，报错会长什么样？」——把错误提前讲。</a:t>
-            </a:r>
-          </a:p>
-          <a:p>
-            <a:r>
-              <a:rPr lang="zh-CN" dirty="0"/>
-              <a:t/>
-            </a:r>
-          </a:p>
-          <a:p>
-            <a:r>
-              <a:rPr lang="zh-CN" dirty="0"/>
-              <a:t>本节目标：知道解释器是什么，能新建并运行第一个脚本</a:t>
-            </a:r>
-          </a:p>
-          <a:p>
-            <a:r>
-              <a:rPr lang="zh-CN" dirty="0"/>
-              <a:t/>
-            </a:r>
-          </a:p>
-          <a:p>
-            <a:r>
-              <a:rPr lang="zh-CN" dirty="0"/>
-              <a:t>看不到懂的地方，回讲义对应小节读一遍，再回来对着这页复述一次——能讲出来才算真懂。</a:t>
-            </a:r>
-          </a:p>
-        </p:txBody>
-      </p:sp>
-    </p:spTree>
-  </p:cSld>
-  <p:clrMapOvr>
-    <a:masterClrMapping/>
-  </p:clrMapOvr>
-</p:notes>
-</file>
-
-<file path=ppt/notesSlides/notesSlide4.xml><?xml version="1.0" encoding="utf-8"?>
-<p:notes xmlns:a="http://schemas.openxmlformats.org/drawingml/2006/main" xmlns:p="http://schemas.openxmlformats.org/presentationml/2006/main" xmlns:r="http://schemas.openxmlformats.org/officeDocument/2006/relationships">
-  <p:cSld>
-    <p:spTree>
-      <p:nvGrpSpPr>
-        <p:cNvPr id="1" name=""/>
-        <p:cNvGrpSpPr/>
-        <p:nvPr/>
-      </p:nvGrpSpPr>
-      <p:grpSpPr>
-        <a:xfrm>
-          <a:off x="0" y="0"/>
-          <a:ext cx="0" cy="0"/>
-          <a:chOff x="0" y="0"/>
-          <a:chExt cx="0" cy="0"/>
-        </a:xfrm>
-      </p:grpSpPr>
-      <p:sp>
-        <p:nvSpPr>
-          <p:cNvPr id="2" name="讲课提示"/>
-          <p:cNvSpPr txBox="1"/>
-          <p:nvPr/>
-        </p:nvSpPr>
-        <p:spPr>
-          <a:xfrm>
-            <a:off x="457200" y="457200"/>
-            <a:ext cx="6858000" cy="4800600"/>
-          </a:xfrm>
-          <a:prstGeom prst="rect">
-            <a:avLst/>
-          </a:prstGeom>
-        </p:spPr>
-        <p:txBody>
-          <a:bodyPr wrap="square"/>
-          <a:lstStyle/>
-          <a:p>
-            <a:r>
-              <a:rPr lang="zh-CN" dirty="0"/>
-              <a:t>第 2 节 · 第一个报错与 Git 拍快照</a:t>
-            </a:r>
-          </a:p>
-          <a:p>
-            <a:r>
-              <a:rPr lang="zh-CN" dirty="0"/>
-              <a:t>单元 0 · 环境与工具链 · W0</a:t>
-            </a:r>
-          </a:p>
-          <a:p>
-            <a:r>
-              <a:rPr lang="zh-CN" dirty="0"/>
-              <a:t/>
-            </a:r>
-          </a:p>
-          <a:p>
-            <a:r>
-              <a:rPr lang="zh-CN" dirty="0"/>
-              <a:t>学习目标：会读 traceback；能用 git 给代码拍快照并恢复</a:t>
-            </a:r>
-          </a:p>
-          <a:p>
-            <a:r>
-              <a:rPr lang="zh-CN" dirty="0"/>
-              <a:t/>
-            </a:r>
-          </a:p>
-          <a:p>
-            <a:r>
-              <a:rPr lang="zh-CN" dirty="0"/>
-              <a:t>课堂实操（40 分钟，不看答案）：</a:t>
-            </a:r>
-          </a:p>
-          <a:p>
-            <a:r>
-              <a:rPr lang="zh-CN" dirty="0"/>
-              <a:t>· 故意触发 3 种报错并读懂 traceback</a:t>
-            </a:r>
-          </a:p>
-          <a:p>
-            <a:r>
-              <a:rPr lang="zh-CN" dirty="0"/>
-              <a:t>· git init / add / commit 走一遍</a:t>
-            </a:r>
-          </a:p>
-          <a:p>
-            <a:r>
-              <a:rPr lang="zh-CN" dirty="0"/>
-              <a:t>· 故意删掉文件，用 git checkout 恢复</a:t>
-            </a:r>
-          </a:p>
-          <a:p>
-            <a:r>
-              <a:rPr lang="zh-CN" dirty="0"/>
-              <a:t/>
-            </a:r>
-          </a:p>
-          <a:p>
-            <a:r>
-              <a:rPr lang="zh-CN" dirty="0"/>
-              <a:t>课后作业：</a:t>
-            </a:r>
-          </a:p>
-          <a:p>
-            <a:r>
-              <a:rPr lang="zh-CN" dirty="0"/>
-              <a:t>· 完成动手练习 0-1 ~ 0-5</a:t>
-            </a:r>
-          </a:p>
-          <a:p>
-            <a:r>
-              <a:rPr lang="zh-CN" dirty="0"/>
-              <a:t/>
-            </a:r>
-          </a:p>
-          <a:p>
-            <a:r>
-              <a:rPr lang="zh-CN" dirty="0"/>
-              <a:t>节奏：讲 20 分钟 → 学员自己敲 40 分钟（不看答案）→ 对讲评自查 20 分钟 → 写作业 10 分钟。</a:t>
-            </a:r>
-          </a:p>
-        </p:txBody>
-      </p:sp>
-    </p:spTree>
-  </p:cSld>
-  <p:clrMapOvr>
-    <a:masterClrMapping/>
-  </p:clrMapOvr>
-</p:notes>
-</file>
-
-<file path=ppt/notesSlides/notesSlide5.xml><?xml version="1.0" encoding="utf-8"?>
-<p:notes xmlns:a="http://schemas.openxmlformats.org/drawingml/2006/main" xmlns:p="http://schemas.openxmlformats.org/presentationml/2006/main" xmlns:r="http://schemas.openxmlformats.org/officeDocument/2006/relationships">
-  <p:cSld>
-    <p:spTree>
-      <p:nvGrpSpPr>
-        <p:cNvPr id="1" name=""/>
-        <p:cNvGrpSpPr/>
-        <p:nvPr/>
-      </p:nvGrpSpPr>
-      <p:grpSpPr>
-        <a:xfrm>
-          <a:off x="0" y="0"/>
-          <a:ext cx="0" cy="0"/>
-          <a:chOff x="0" y="0"/>
-          <a:chExt cx="0" cy="0"/>
-        </a:xfrm>
-      </p:grpSpPr>
-      <p:sp>
-        <p:nvSpPr>
-          <p:cNvPr id="2" name="讲课提示"/>
-          <p:cNvSpPr txBox="1"/>
-          <p:nvPr/>
-        </p:nvSpPr>
-        <p:spPr>
-          <a:xfrm>
-            <a:off x="457200" y="457200"/>
-            <a:ext cx="6858000" cy="4800600"/>
-          </a:xfrm>
-          <a:prstGeom prst="rect">
-            <a:avLst/>
-          </a:prstGeom>
-        </p:spPr>
-        <p:txBody>
-          <a:bodyPr wrap="square"/>
-          <a:lstStyle/>
-          <a:p>
-            <a:r>
-              <a:rPr lang="zh-CN" dirty="0"/>
-              <a:t>第 2 节 · 核心知识点：第一个报错与 Git 拍快照</a:t>
-            </a:r>
-          </a:p>
-          <a:p>
-            <a:r>
-              <a:rPr lang="zh-CN" dirty="0"/>
-              <a:t/>
-            </a:r>
-          </a:p>
-          <a:p>
-            <a:r>
-              <a:rPr lang="zh-CN" dirty="0"/>
-              <a:t>讲这一页时：先让学生说出上节课的结论，再逐块讲要点。</a:t>
-            </a:r>
-          </a:p>
-          <a:p>
-            <a:r>
-              <a:rPr lang="zh-CN" dirty="0"/>
-              <a:t>每讲完一块，问一句「这一步如果写错了，报错会长什么样？」——把错误提前讲。</a:t>
-            </a:r>
-          </a:p>
-          <a:p>
-            <a:r>
-              <a:rPr lang="zh-CN" dirty="0"/>
-              <a:t/>
-            </a:r>
-          </a:p>
-          <a:p>
-            <a:r>
-              <a:rPr lang="zh-CN" dirty="0"/>
-              <a:t>本节目标：会读 traceback；能用 git 给代码拍快照并恢复</a:t>
-            </a:r>
-          </a:p>
-          <a:p>
-            <a:r>
-              <a:rPr lang="zh-CN" dirty="0"/>
-              <a:t/>
-            </a:r>
-          </a:p>
-          <a:p>
-            <a:r>
-              <a:rPr lang="zh-CN" dirty="0"/>
-              <a:t>看不到懂的地方，回讲义对应小节读一遍，再回来对着这页复述一次——能讲出来才算真懂。</a:t>
-            </a:r>
-          </a:p>
-        </p:txBody>
-      </p:sp>
-    </p:spTree>
-  </p:cSld>
-  <p:clrMapOvr>
-    <a:masterClrMapping/>
-  </p:clrMapOvr>
-</p:notes>
-</file>
-
-<file path=ppt/notesSlides/notesSlide6.xml><?xml version="1.0" encoding="utf-8"?>
-<p:notes xmlns:a="http://schemas.openxmlformats.org/drawingml/2006/main" xmlns:p="http://schemas.openxmlformats.org/presentationml/2006/main" xmlns:r="http://schemas.openxmlformats.org/officeDocument/2006/relationships">
-  <p:cSld>
-    <p:spTree>
-      <p:nvGrpSpPr>
-        <p:cNvPr id="1" name=""/>
-        <p:cNvGrpSpPr/>
-        <p:nvPr/>
-      </p:nvGrpSpPr>
-      <p:grpSpPr>
-        <a:xfrm>
-          <a:off x="0" y="0"/>
-          <a:ext cx="0" cy="0"/>
-          <a:chOff x="0" y="0"/>
-          <a:chExt cx="0" cy="0"/>
-        </a:xfrm>
-      </p:grpSpPr>
-      <p:sp>
-        <p:nvSpPr>
-          <p:cNvPr id="2" name="讲课提示"/>
-          <p:cNvSpPr txBox="1"/>
-          <p:nvPr/>
-        </p:nvSpPr>
-        <p:spPr>
-          <a:xfrm>
-            <a:off x="457200" y="457200"/>
-            <a:ext cx="6858000" cy="4800600"/>
-          </a:xfrm>
-          <a:prstGeom prst="rect">
-            <a:avLst/>
-          </a:prstGeom>
-        </p:spPr>
-        <p:txBody>
-          <a:bodyPr wrap="square"/>
-          <a:lstStyle/>
-          <a:p>
-            <a:r>
-              <a:rPr lang="zh-CN" dirty="0"/>
-              <a:t>第 3 节 · 目录结构、print 与注释</a:t>
-            </a:r>
-          </a:p>
-          <a:p>
-            <a:r>
-              <a:rPr lang="zh-CN" dirty="0"/>
-              <a:t>单元 0 · 环境与工具链 · W0</a:t>
-            </a:r>
-          </a:p>
-          <a:p>
-            <a:r>
-              <a:rPr lang="zh-CN" dirty="0"/>
-              <a:t/>
-            </a:r>
-          </a:p>
-          <a:p>
-            <a:r>
-              <a:rPr lang="zh-CN" dirty="0"/>
-              <a:t>学习目标：掌握 print 的 sep / end、f-string 与注释规范</a:t>
-            </a:r>
-          </a:p>
-          <a:p>
-            <a:r>
-              <a:rPr lang="zh-CN" dirty="0"/>
-              <a:t/>
-            </a:r>
-          </a:p>
-          <a:p>
-            <a:r>
-              <a:rPr lang="zh-CN" dirty="0"/>
-              <a:t>课堂实操（40 分钟，不看答案）：</a:t>
-            </a:r>
-          </a:p>
-          <a:p>
-            <a:r>
-              <a:rPr lang="zh-CN" dirty="0"/>
-              <a:t>· 修改示例 4 的 sep 和 end，观察输出变化</a:t>
-            </a:r>
-          </a:p>
-          <a:p>
-            <a:r>
-              <a:rPr lang="zh-CN" dirty="0"/>
-              <a:t>· 用 f-string 输出自我介绍</a:t>
-            </a:r>
-          </a:p>
-          <a:p>
-            <a:r>
-              <a:rPr lang="zh-CN" dirty="0"/>
-              <a:t>· 把 hello.py 写成有注释的规范版本</a:t>
-            </a:r>
-          </a:p>
-          <a:p>
-            <a:r>
-              <a:rPr lang="zh-CN" dirty="0"/>
-              <a:t/>
-            </a:r>
-          </a:p>
-          <a:p>
-            <a:r>
-              <a:rPr lang="zh-CN" dirty="0"/>
-              <a:t>课后作业：</a:t>
-            </a:r>
-          </a:p>
-          <a:p>
-            <a:r>
-              <a:rPr lang="zh-CN" dirty="0"/>
-              <a:t>· 完成动手练习进阶档 0-6 ~ 0-8</a:t>
-            </a:r>
-          </a:p>
-          <a:p>
-            <a:r>
-              <a:rPr lang="zh-CN" dirty="0"/>
-              <a:t/>
-            </a:r>
-          </a:p>
-          <a:p>
-            <a:r>
-              <a:rPr lang="zh-CN" dirty="0"/>
-              <a:t>节奏：讲 20 分钟 → 学员自己敲 40 分钟（不看答案）→ 对讲评自查 20 分钟 → 写作业 10 分钟。</a:t>
-            </a:r>
-          </a:p>
-        </p:txBody>
-      </p:sp>
-    </p:spTree>
-  </p:cSld>
-  <p:clrMapOvr>
-    <a:masterClrMapping/>
-  </p:clrMapOvr>
-</p:notes>
-</file>
-
-<file path=ppt/notesSlides/notesSlide7.xml><?xml version="1.0" encoding="utf-8"?>
-<p:notes xmlns:a="http://schemas.openxmlformats.org/drawingml/2006/main" xmlns:p="http://schemas.openxmlformats.org/presentationml/2006/main" xmlns:r="http://schemas.openxmlformats.org/officeDocument/2006/relationships">
-  <p:cSld>
-    <p:spTree>
-      <p:nvGrpSpPr>
-        <p:cNvPr id="1" name=""/>
-        <p:cNvGrpSpPr/>
-        <p:nvPr/>
-      </p:nvGrpSpPr>
-      <p:grpSpPr>
-        <a:xfrm>
-          <a:off x="0" y="0"/>
-          <a:ext cx="0" cy="0"/>
-          <a:chOff x="0" y="0"/>
-          <a:chExt cx="0" cy="0"/>
-        </a:xfrm>
-      </p:grpSpPr>
-      <p:sp>
-        <p:nvSpPr>
-          <p:cNvPr id="2" name="讲课提示"/>
-          <p:cNvSpPr txBox="1"/>
-          <p:nvPr/>
-        </p:nvSpPr>
-        <p:spPr>
-          <a:xfrm>
-            <a:off x="457200" y="457200"/>
-            <a:ext cx="6858000" cy="4800600"/>
-          </a:xfrm>
-          <a:prstGeom prst="rect">
-            <a:avLst/>
-          </a:prstGeom>
-        </p:spPr>
-        <p:txBody>
-          <a:bodyPr wrap="square"/>
-          <a:lstStyle/>
-          <a:p>
-            <a:r>
-              <a:rPr lang="zh-CN" dirty="0"/>
-              <a:t>第 3 节 · 核心知识点：目录结构、print 与注释</a:t>
-            </a:r>
-          </a:p>
-          <a:p>
-            <a:r>
-              <a:rPr lang="zh-CN" dirty="0"/>
-              <a:t/>
-            </a:r>
-          </a:p>
-          <a:p>
-            <a:r>
-              <a:rPr lang="zh-CN" dirty="0"/>
-              <a:t>讲这一页时：先让学生说出上节课的结论，再逐块讲要点。</a:t>
-            </a:r>
-          </a:p>
-          <a:p>
-            <a:r>
-              <a:rPr lang="zh-CN" dirty="0"/>
-              <a:t>每讲完一块，问一句「这一步如果写错了，报错会长什么样？」——把错误提前讲。</a:t>
-            </a:r>
-          </a:p>
-          <a:p>
-            <a:r>
-              <a:rPr lang="zh-CN" dirty="0"/>
-              <a:t/>
-            </a:r>
-          </a:p>
-          <a:p>
-            <a:r>
-              <a:rPr lang="zh-CN" dirty="0"/>
-              <a:t>本节目标：掌握 print 的 sep / end、f-string 与注释规范</a:t>
-            </a:r>
-          </a:p>
-          <a:p>
-            <a:r>
-              <a:rPr lang="zh-CN" dirty="0"/>
-              <a:t/>
-            </a:r>
-          </a:p>
-          <a:p>
-            <a:r>
-              <a:rPr lang="zh-CN" dirty="0"/>
-              <a:t>看不到懂的地方，回讲义对应小节读一遍，再回来对着这页复述一次——能讲出来才算真懂。</a:t>
-            </a:r>
-          </a:p>
-        </p:txBody>
-      </p:sp>
-    </p:spTree>
-  </p:cSld>
-  <p:clrMapOvr>
-    <a:masterClrMapping/>
-  </p:clrMapOvr>
-</p:notes>
-</file>
-
-<file path=ppt/notesSlides/notesSlide8.xml><?xml version="1.0" encoding="utf-8"?>
-<p:notes xmlns:a="http://schemas.openxmlformats.org/drawingml/2006/main" xmlns:p="http://schemas.openxmlformats.org/presentationml/2006/main" xmlns:r="http://schemas.openxmlformats.org/officeDocument/2006/relationships">
-  <p:cSld>
-    <p:spTree>
-      <p:nvGrpSpPr>
-        <p:cNvPr id="1" name=""/>
-        <p:cNvGrpSpPr/>
-        <p:nvPr/>
-      </p:nvGrpSpPr>
-      <p:grpSpPr>
-        <a:xfrm>
-          <a:off x="0" y="0"/>
-          <a:ext cx="0" cy="0"/>
-          <a:chOff x="0" y="0"/>
-          <a:chExt cx="0" cy="0"/>
-        </a:xfrm>
-      </p:grpSpPr>
-      <p:sp>
-        <p:nvSpPr>
-          <p:cNvPr id="2" name="讲课提示"/>
-          <p:cNvSpPr txBox="1"/>
-          <p:nvPr/>
-        </p:nvSpPr>
-        <p:spPr>
-          <a:xfrm>
-            <a:off x="457200" y="457200"/>
-            <a:ext cx="6858000" cy="4800600"/>
-          </a:xfrm>
-          <a:prstGeom prst="rect">
-            <a:avLst/>
-          </a:prstGeom>
-        </p:spPr>
-        <p:txBody>
-          <a:bodyPr wrap="square"/>
-          <a:lstStyle/>
-          <a:p>
-            <a:r>
-              <a:rPr lang="zh-CN" dirty="0"/>
-              <a:t>第 4 节 · 动手实战与答案讲评</a:t>
-            </a:r>
-          </a:p>
-          <a:p>
-            <a:r>
-              <a:rPr lang="zh-CN" dirty="0"/>
-              <a:t>单元 0 · 环境与工具链 · W0</a:t>
-            </a:r>
-          </a:p>
-          <a:p>
-            <a:r>
-              <a:rPr lang="zh-CN" dirty="0"/>
-              <a:t/>
-            </a:r>
-          </a:p>
-          <a:p>
-            <a:r>
-              <a:rPr lang="zh-CN" dirty="0"/>
-              <a:t>学习目标：独立完成单元 0 全部练习，并能对照答案自查</a:t>
-            </a:r>
-          </a:p>
-          <a:p>
-            <a:r>
-              <a:rPr lang="zh-CN" dirty="0"/>
-              <a:t/>
-            </a:r>
-          </a:p>
-          <a:p>
-            <a:r>
-              <a:rPr lang="zh-CN" dirty="0"/>
-              <a:t>课堂实操（40 分钟，不看答案）：</a:t>
-            </a:r>
-          </a:p>
-          <a:p>
-            <a:r>
-              <a:rPr lang="zh-CN" dirty="0"/>
-              <a:t>· 限时 20 分钟独立完成基础档</a:t>
-            </a:r>
-          </a:p>
-          <a:p>
-            <a:r>
-              <a:rPr lang="zh-CN" dirty="0"/>
-              <a:t>· 逐题对照参考答案，错的当场重跑</a:t>
-            </a:r>
-          </a:p>
-          <a:p>
-            <a:r>
-              <a:rPr lang="zh-CN" dirty="0"/>
-              <a:t/>
-            </a:r>
-          </a:p>
-          <a:p>
-            <a:r>
-              <a:rPr lang="zh-CN" dirty="0"/>
-              <a:t>课后作业：</a:t>
-            </a:r>
-          </a:p>
-          <a:p>
-            <a:r>
-              <a:rPr lang="zh-CN" dirty="0"/>
-              <a:t>· 产出：可运行的 hello.py + 首次 git 提交</a:t>
-            </a:r>
-          </a:p>
-          <a:p>
-            <a:r>
-              <a:rPr lang="zh-CN" dirty="0"/>
-              <a:t/>
-            </a:r>
-          </a:p>
-          <a:p>
-            <a:r>
-              <a:rPr lang="zh-CN" dirty="0"/>
-              <a:t>节奏：讲 20 分钟 → 学员自己敲 40 分钟（不看答案）→ 对讲评自查 20 分钟 → 写作业 10 分钟。</a:t>
-            </a:r>
-          </a:p>
-        </p:txBody>
-      </p:sp>
-    </p:spTree>
-  </p:cSld>
-  <p:clrMapOvr>
-    <a:masterClrMapping/>
-  </p:clrMapOvr>
-</p:notes>
-</file>
-
-<file path=ppt/notesSlides/notesSlide9.xml><?xml version="1.0" encoding="utf-8"?>
-<p:notes xmlns:a="http://schemas.openxmlformats.org/drawingml/2006/main" xmlns:p="http://schemas.openxmlformats.org/presentationml/2006/main" xmlns:r="http://schemas.openxmlformats.org/officeDocument/2006/relationships">
-  <p:cSld>
-    <p:spTree>
-      <p:nvGrpSpPr>
-        <p:cNvPr id="1" name=""/>
-        <p:cNvGrpSpPr/>
-        <p:nvPr/>
-      </p:nvGrpSpPr>
-      <p:grpSpPr>
-        <a:xfrm>
-          <a:off x="0" y="0"/>
-          <a:ext cx="0" cy="0"/>
-          <a:chOff x="0" y="0"/>
-          <a:chExt cx="0" cy="0"/>
-        </a:xfrm>
-      </p:grpSpPr>
-      <p:sp>
-        <p:nvSpPr>
-          <p:cNvPr id="2" name="讲课提示"/>
-          <p:cNvSpPr txBox="1"/>
-          <p:nvPr/>
-        </p:nvSpPr>
-        <p:spPr>
-          <a:xfrm>
-            <a:off x="457200" y="457200"/>
-            <a:ext cx="6858000" cy="4800600"/>
-          </a:xfrm>
-          <a:prstGeom prst="rect">
-            <a:avLst/>
-          </a:prstGeom>
-        </p:spPr>
-        <p:txBody>
-          <a:bodyPr wrap="square"/>
-          <a:lstStyle/>
-          <a:p>
-            <a:r>
-              <a:rPr lang="zh-CN" dirty="0"/>
-              <a:t>第 4 节 · 核心知识点：动手实战与答案讲评</a:t>
-            </a:r>
-          </a:p>
-          <a:p>
-            <a:r>
-              <a:rPr lang="zh-CN" dirty="0"/>
-              <a:t/>
-            </a:r>
-          </a:p>
-          <a:p>
-            <a:r>
-              <a:rPr lang="zh-CN" dirty="0"/>
-              <a:t>讲这一页时：先让学生说出上节课的结论，再逐块讲要点。</a:t>
-            </a:r>
-          </a:p>
-          <a:p>
-            <a:r>
-              <a:rPr lang="zh-CN" dirty="0"/>
-              <a:t>每讲完一块，问一句「这一步如果写错了，报错会长什么样？」——把错误提前讲。</a:t>
-            </a:r>
-          </a:p>
-          <a:p>
-            <a:r>
-              <a:rPr lang="zh-CN" dirty="0"/>
-              <a:t/>
-            </a:r>
-          </a:p>
-          <a:p>
-            <a:r>
-              <a:rPr lang="zh-CN" dirty="0"/>
-              <a:t>本节目标：独立完成单元 0 全部练习，并能对照答案自查</a:t>
-            </a:r>
-          </a:p>
-          <a:p>
-            <a:r>
-              <a:rPr lang="zh-CN" dirty="0"/>
-              <a:t/>
-            </a:r>
-          </a:p>
-          <a:p>
-            <a:r>
-              <a:rPr lang="zh-CN" dirty="0"/>
-              <a:t>看不到懂的地方，回讲义对应小节读一遍，再回来对着这页复述一次——能讲出来才算真懂。</a:t>
-            </a:r>
-          </a:p>
-        </p:txBody>
-      </p:sp>
-    </p:spTree>
-  </p:cSld>
-  <p:clrMapOvr>
-    <a:masterClrMapping/>
-  </p:clrMapOvr>
-</p:notes>
-</file>
-
 <file path=ppt/slideLayouts/slideLayout1.xml><?xml version="1.0" encoding="utf-8"?>
 <p:sldLayout xmlns:p="http://schemas.openxmlformats.org/presentationml/2006/main" xmlns:a="http://schemas.openxmlformats.org/drawingml/2006/main">
   <p:cSld name="DEFAULT">
@@ -1827,7 +555,7 @@
   <p:cSld>
     <p:spTree>
       <p:nvGrpSpPr>
-        <p:cNvPr id="1" name="" descr="&lt;Slide style={{ width: '1280px', height: '720px', backgroundColor: '#FAFCFE', padding: 0, position: 'relative', overflow: 'hidden' }}&gt;&#13;&#10;    &lt;Box style={{ position: 'absolute', left: 0, top: 0, width: '1280px', height: '150px', background: '#1F5FA8' }} /&gt;&#13;&#10;    &lt;Box style={{ position: 'absolute', left: 64, top: 34, width: '1152px', flexDirection: 'column' }}&gt;&#13;&#10;        &lt;Text style={{ fontSize: 15, fontWeight: 'bold', color: '#BFD9F2', letterSpacing: 2 }}&gt;阶段 1 · 单元 0&lt;/Text&gt;&#13;&#10;        &lt;Text style={{ fontSize: 38, fontWeight: 'bold', color: '#FFFFFF', marginTop: 6 }}&gt;环境与工具链&lt;/Text&gt;&#13;&#10;    &lt;/Box&gt;&#13;&#10;    &lt;Box style={{ position: 'absolute', left: 64, top: 168, width: '1152px', height: 470 }}&gt;&#13;&#10;        &lt;svg width='1152' height='470' viewBox='0 0 1152 470'&gt;&#13;&#10;            &lt;text x='0' y='18' fontSize='15' fontWeight='bold' fill='#16232E' fontFamily='Microsoft YaHei'&gt;本单元共 5 节课&lt;/text&gt;&#13;&#10;            &lt;rect x='0' y='196' width='1152' height='38' rx='7' fill='#FFFFFF' /&gt;&lt;text x='16' y='221' fontSize='15' fontWeight='bold' fill='#1F5FA8' fontFamily='Microsoft YaHei'&gt;第 1 节&lt;/text&gt;&lt;text x='96' y='221' fontSize='15' fill='#16232E' fontFamily='Microsoft YaHei'&gt;装好 Python 与 VS Code&lt;/text&gt;&lt;text x='1080' y='221' fontSize='13' fill='#5A6B7A' textAnchor='end' fontFamily='Microsoft YaHei'&gt;W0&lt;/text&gt;&lt;rect x='0' y='238' width='1152' height='38' rx='7' fill='#F2F7FD' /&gt;&lt;text x='16' y='263' fontSize='15' fontWeight='bold' fill='#1F5FA8' fontFamily='Microsoft YaHei'&gt;第 2 节&lt;/text&gt;&lt;text x='96' y='263' fontSize='15' fill='#16232E' fontFamily='Microsoft YaHei'&gt;第一个报错与 Git 拍快照&lt;/text&gt;&lt;text x='1080' y='263' fontSize='13' fill='#5A6B7A' textAnchor='end' fontFamily='Microsoft YaHei'&gt;W0&lt;/text&gt;&lt;rect x='0' y='280' width='1152' height='38' rx='7' fill='#FFFFFF' /&gt;&lt;text x='16' y='305' fontSize='15' fontWeight='bold' fill='#1F5FA8' fontFamily='Microsoft YaHei'&gt;第 3 节&lt;/text&gt;&lt;text x='96' y='305' fontSize='15' fill='#16232E' fontFamily='Microsoft YaHei'&gt;目录结构、print 与注释&lt;/text&gt;&lt;text x='1080' y='305' fontSize='13' fill='#5A6B7A' textAnchor='end' fontFamily='Microsoft YaHei'&gt;W0&lt;/text&gt;&lt;rect x='0' y='322' width='1152' height='38' rx='7' fill='#F2F7FD' /&gt;&lt;text x='16' y='347' fontSize='15' fontWeight='bold' fill='#1F5FA8' fontFamily='Microsoft YaHei'&gt;第 4 节&lt;/text&gt;&lt;text x='96' y='347' fontSize='15' fill='#16232E' fontFamily='Microsoft YaHei'&gt;动手实战与答案讲评&lt;/text&gt;&lt;text x='1080' y='347' fontSize='13' fill='#5A6B7A' textAnchor='end' fontFamily='Microsoft YaHei'&gt;W0&lt;/text&gt;&lt;rect x='0' y='364' width='1152' height='38' rx='7' fill='#FFFFFF' /&gt;&lt;text x='16' y='389' fontSize='15' fontWeight='bold' fill='#1F5FA8' fontFamily='Microsoft YaHei'&gt;第 5 节&lt;/text&gt;&lt;text x='96' y='389' fontSize='15' fill='#16232E' fontFamily='Microsoft YaHei'&gt;单元 0 验收复盘&lt;/text&gt;&lt;text x='1080' y='389' fontSize='13' fill='#5A6B7A' textAnchor='end' fontFamily='Microsoft YaHei'&gt;W0&lt;/text&gt;&#13;&#10;        &lt;/svg&gt;&#13;&#10;    &lt;/Box&gt;&#13;&#10;    &lt;Box style={{ position: 'absolute', left: 64, bottom: 22, width: '1152px', flexDirection: 'row', justifyContent: 'space-between' }}&gt;&#13;&#10;        &lt;Text style={{ fontSize: 13, color: '#8A9AAA' }}&gt;Python 讲授课件 · 逐节版&lt;/Text&gt;&#13;&#10;        &lt;Text style={{ fontSize: 13, color: '#8A9AAA' }}&gt;单元 0 · 封面&lt;/Text&gt;&#13;&#10;    &lt;/Box&gt;&#13;&#10;&lt;/Slide&gt;&#13;&#10;"/>
+        <p:cNvPr id="1" name="" descr="&lt;Slide style={{ width: '1280px', height: '720px', backgroundColor: '#FAFCFE', padding: 0, position: 'relative', overflow: 'hidden' }}&gt;&#13;&#10;    &lt;Box style={{ position: 'absolute', left: 0, top: 0, width: '1280px', height: '150px', background: '#1F5FA8' }} /&gt;&#13;&#10;    &lt;Box style={{ position: 'absolute', left: 64, top: 34, width: '1152px', flexDirection: 'column' }}&gt;&#13;&#10;        &lt;Text style={{ fontSize: 15, fontWeight: 'bold', color: '#BFD9F2', letterSpacing: 2 }}&gt;阶段 1 · 单元 0&lt;/Text&gt;&#13;&#10;        &lt;Text style={{ fontSize: 38, fontWeight: 'bold', color: '#FFFFFF', marginTop: 6 }}&gt;环境与工具链&lt;/Text&gt;&#13;&#10;    &lt;/Box&gt;&#13;&#10;    &lt;Box style={{ position: 'absolute', left: 64, top: 168, width: '1152px', height: 470 }}&gt;&#13;&#10;        &lt;svg width='1152' height='470' viewBox='0 0 1152 470'&gt;&#13;&#10;            &lt;text x='0' y='18' fontSize='15' fontWeight='bold' fill='#16232E' fontFamily='Microsoft YaHei'&gt;本单元共 5 节课&lt;/text&gt;&#13;&#10;            &lt;rect x='0' y='56.0' width='1152' height='48.0' rx='7' fill='#FFFFFF' /&gt;&lt;text x='16' y='85.0' fontSize='15' fontWeight='bold' fill='#1F5FA8' fontFamily='Microsoft YaHei'&gt;第 1 节&lt;/text&gt;&lt;text x='96' y='85.0' fontSize='15' fill='#16232E' fontFamily='Microsoft YaHei'&gt;装好 Python 与 VS Code&lt;/text&gt;&lt;text x='1080' y='85.0' fontSize='13' fill='#5A6B7A' textAnchor='end' fontFamily='Microsoft YaHei'&gt;W0&lt;/text&gt;&lt;rect x='0' y='135.2' width='1152' height='48.0' rx='7' fill='#F2F7FD' /&gt;&lt;text x='16' y='164.2' fontSize='15' fontWeight='bold' fill='#1F5FA8' fontFamily='Microsoft YaHei'&gt;第 2 节&lt;/text&gt;&lt;text x='96' y='164.2' fontSize='15' fill='#16232E' fontFamily='Microsoft YaHei'&gt;第一个报错与 Git 拍快照&lt;/text&gt;&lt;text x='1080' y='164.2' fontSize='13' fill='#5A6B7A' textAnchor='end' fontFamily='Microsoft YaHei'&gt;W0&lt;/text&gt;&lt;rect x='0' y='214.4' width='1152' height='48.0' rx='7' fill='#FFFFFF' /&gt;&lt;text x='16' y='243.4' fontSize='15' fontWeight='bold' fill='#1F5FA8' fontFamily='Microsoft YaHei'&gt;第 3 节&lt;/text&gt;&lt;text x='96' y='243.4' fontSize='15' fill='#16232E' fontFamily='Microsoft YaHei'&gt;目录结构、print 与注释&lt;/text&gt;&lt;text x='1080' y='243.4' fontSize='13' fill='#5A6B7A' textAnchor='end' fontFamily='Microsoft YaHei'&gt;W0&lt;/text&gt;&lt;rect x='0' y='293.6' width='1152' height='48.0' rx='7' fill='#F2F7FD' /&gt;&lt;text x='16' y='322.6' fontSize='15' fontWeight='bold' fill='#1F5FA8' fontFamily='Microsoft YaHei'&gt;第 4 节&lt;/text&gt;&lt;text x='96' y='322.6' fontSize='15' fill='#16232E' fontFamily='Microsoft YaHei'&gt;动手实战与答案讲评&lt;/text&gt;&lt;text x='1080' y='322.6' fontSize='13' fill='#5A6B7A' textAnchor='end' fontFamily='Microsoft YaHei'&gt;W0&lt;/text&gt;&lt;rect x='0' y='372.8' width='1152' height='48.0' rx='7' fill='#FFFFFF' /&gt;&lt;text x='16' y='401.8' fontSize='15' fontWeight='bold' fill='#1F5FA8' fontFamily='Microsoft YaHei'&gt;第 5 节&lt;/text&gt;&lt;text x='96' y='401.8' fontSize='15' fill='#16232E' fontFamily='Microsoft YaHei'&gt;单元 0 验收复盘&lt;/text&gt;&lt;text x='1080' y='401.8' fontSize='13' fill='#5A6B7A' textAnchor='end' fontFamily='Microsoft YaHei'&gt;W0&lt;/text&gt;&#13;&#10;        &lt;/svg&gt;&#13;&#10;    &lt;/Box&gt;&#13;&#10;    &lt;Box style={{ position: 'absolute', left: 64, bottom: 22, width: '1152px', flexDirection: 'row', justifyContent: 'space-between' }}&gt;&#13;&#10;        &lt;Text style={{ fontSize: 13, color: '#8A9AAA' }}&gt;Python 讲授课件 · 逐节版&lt;/Text&gt;&#13;&#10;        &lt;Text style={{ fontSize: 13, color: '#8A9AAA' }}&gt;单元 0 · 封面&lt;/Text&gt;&#13;&#10;    &lt;/Box&gt;&#13;&#10;&lt;/Slide&gt;&#13;&#10;"/>
         <p:cNvGrpSpPr/>
         <p:nvPr/>
       </p:nvGrpSpPr>
@@ -3432,7 +2160,7 @@
   <p:cSld>
     <p:spTree>
       <p:nvGrpSpPr>
-        <p:cNvPr id="42" name="" descr="&lt;Slide style={{ width: '1280px', height: '720px', backgroundColor: '#FAFCFE', padding: 0, position: 'relative', overflow: 'hidden' }}&gt;&#13;&#10;    &lt;Box style={{ position: 'absolute', left: 64, top: 36, width: '1152px', flexDirection: 'row', alignItems: 'center', gap: 12 }}&gt;&#13;&#10;        &lt;Box style={{ background: '#0E9B78', borderRadius: 5, padding: '3px 11px' }}&gt;&#13;&#10;            &lt;Text style={{ fontSize: 14, fontWeight: 'bold', color: '#FFFFFF' }}&gt;第 1 节&lt;/Text&gt;&#13;&#10;        &lt;/Box&gt;&#13;&#10;        &lt;Text style={{ fontSize: 30, fontWeight: 'bold', color: '#16232E' }}&gt;核心知识点&lt;/Text&gt;&#13;&#10;        &lt;Text style={{ fontSize: 15, color: '#5A6B7A', marginTop: 10 }}&gt;· 装好 Python 与 VS Code&lt;/Text&gt;&#13;&#10;    &lt;/Box&gt;&#13;&#10;    &lt;Box style={{ position: 'absolute', left: 0, top: 0, width: '1280px', height: '720px' }}&gt;&#13;&#10;        &lt;svg width='1280' height='720' viewBox='0 0 1280 720'&gt;&#13;&#10;            &lt;rect x='64' y='96' width='368' height='330' rx='12' fill='#FFFFFF' stroke='#D8E3EE' /&gt;&lt;rect x='64' y='96' width='368' height='4' rx='2' fill='#1F5FA8' /&gt;&lt;text x='82' y='130' fontSize='15.5' fontWeight='bold' fill='#1F5FA8' textAnchor='start' fontFamily='Microsoft YaHei'&gt;2.1 Python 解释器：写的是&quot;食材&quot;，跑的是&quot;&lt;/text&gt;&lt;text x='82' y='153' fontSize='15.5' fontWeight='bold' fill='#1F5FA8' textAnchor='start' fontFamily='Microsoft YaHei'&gt;厨师&quot;&lt;/text&gt;&lt;text x='82' y='192.0' fontSize='13' fill='#3A4A58' textAnchor='start' fontFamily='Microsoft YaHei'&gt;· Python 是一门解释型语言。你写的 .py 文件只是纯文&lt;/text&gt;&lt;text x='82' y='211.5' fontSize='13' fill='#3A4A58' textAnchor='start' fontFamily='Microsoft YaHei'&gt;本（叫&quot;源代码&quot;），机器本身并不认识它。真…&lt;/text&gt;&lt;rect x='468' y='96' width='368' height='330' rx='12' fill='#FFFFFF' stroke='#D8E3EE' /&gt;&lt;rect x='468' y='96' width='368' height='4' rx='2' fill='#1F5FA8' /&gt;&lt;text x='486' y='130' fontSize='15.5' fontWeight='bold' fill='#1F5FA8' textAnchor='start' fontFamily='Microsoft YaHei'&gt;2.2 终端（命令行）：和解释器对话的窗口&lt;/text&gt;&lt;text x='486' y='169.0' fontSize='13' fill='#3A4A58' textAnchor='start' fontFamily='Microsoft YaHei'&gt;· cd 文件夹名 —— 进入某个目录（change directory&lt;/text&gt;&lt;text x='486' y='188.5' fontSize='13' fill='#3A4A58' textAnchor='start' fontFamily='Microsoft YaHei'&gt;）&lt;/text&gt;&lt;text x='486' y='217.0' fontSize='13' fill='#3A4A58' textAnchor='start' fontFamily='Microsoft YaHei'&gt;· dir（Windows）或 ls（macOS/Linux）—— 列出当前&lt;/text&gt;&lt;text x='486' y='236.5' fontSize='13' fill='#3A4A58' textAnchor='start' fontFamily='Microsoft YaHei'&gt;目录里有什么&lt;/text&gt;&lt;rect x='872' y='96' width='368' height='330' rx='12' fill='#FFFFFF' stroke='#D8E3EE' /&gt;&lt;rect x='872' y='96' width='368' height='4' rx='2' fill='#1F5FA8' /&gt;&lt;text x='890' y='130' fontSize='15.5' fontWeight='bold' fill='#1F5FA8' textAnchor='start' fontFamily='Microsoft YaHei'&gt;2.3 VS Code + Python 扩展：写代码的写…&lt;/text&gt;&lt;text x='890' y='169.0' fontSize='13' fill='#3A4A58' textAnchor='start' fontFamily='Microsoft YaHei'&gt;· 右上角的 ▶ 播放按钮，一键运行当前文件&lt;/text&gt;&lt;text x='890' y='197.5' fontSize='13' fill='#3A4A58' textAnchor='start' fontFamily='Microsoft YaHei'&gt;· 智能提示：打了一半的函数名，会自动补全并显示参数说&lt;/text&gt;&lt;text x='890' y='217.0' fontSize='13' fill='#3A4A58' textAnchor='start' fontFamily='Microsoft YaHei'&gt;明&lt;/text&gt;&lt;text x='890' y='245.5' fontSize='13' fill='#3A4A58' textAnchor='start' fontFamily='Microsoft YaHei'&gt;· 错误提示：你在当前文件还没运行之前，就能看到红波浪&lt;/text&gt;&lt;text x='890' y='265.0' fontSize='13' fill='#3A4A58' textAnchor='start' fontFamily='Microsoft YaHei'&gt;线告诉你哪里写错了&lt;/text&gt;&lt;rect x='64' y='574' width='1152' height='66' rx='12' fill='#EEF5FB' /&gt;&lt;text x='84' y='616' fontSize='14' fill='#243444' textAnchor='start' fontFamily='Microsoft YaHei'&gt;看不懂的地方先回讲义对应小节读一遍，再回来对着这页复述一次——能讲出来才算真懂。&lt;/text&gt;&#13;&#10;            &lt;text x='64' y='684' fontSize='13' fill='#8A9AAA' fontFamily='Microsoft YaHei'&gt;Python 讲授课件 · 逐节版&lt;/text&gt;&#13;&#10;            &lt;text x='1216' y='684' fontSize='13' fill='#8A9AAA' textAnchor='end' fontFamily='Microsoft YaHei'&gt;单元 0 · 第 1 节&lt;/text&gt;&#13;&#10;        &lt;/svg&gt;&#13;&#10;    &lt;/Box&gt;&#13;&#10;&lt;/Slide&gt;&#13;&#10;"/>
+        <p:cNvPr id="42" name="" descr="&lt;Slide style={{ width: '1280px', height: '720px', backgroundColor: '#FAFCFE', padding: 0, position: 'relative', overflow: 'hidden' }}&gt;&#13;&#10;    &lt;Box style={{ position: 'absolute', left: 64, top: 36, width: '1152px', flexDirection: 'row', alignItems: 'center', gap: 12 }}&gt;&#13;&#10;        &lt;Box style={{ background: '#0E9B78', borderRadius: 5, padding: '3px 11px' }}&gt;&#13;&#10;            &lt;Text style={{ fontSize: 14, fontWeight: 'bold', color: '#FFFFFF' }}&gt;第 1 节&lt;/Text&gt;&#13;&#10;        &lt;/Box&gt;&#13;&#10;        &lt;Text style={{ fontSize: 30, fontWeight: 'bold', color: '#16232E' }}&gt;核心知识点&lt;/Text&gt;&#13;&#10;        &lt;Text style={{ fontSize: 15, color: '#5A6B7A', marginTop: 10 }}&gt;· 装好 Python 与 VS Code&lt;/Text&gt;&#13;&#10;    &lt;/Box&gt;&#13;&#10;    &lt;Box style={{ position: 'absolute', left: 0, top: 0, width: '1280px', height: '720px' }}&gt;&#13;&#10;        &lt;svg width='1280' height='720' viewBox='0 0 1280 720'&gt;&#13;&#10;            &lt;rect x='64' y='96' width='368' height='330' rx='12' fill='#FFFFFF' stroke='#D8E3EE' /&gt;&lt;rect x='64' y='96' width='368' height='4' rx='2' fill='#1F5FA8' /&gt;&lt;text x='82' y='130' fontSize='15.5' fontWeight='bold' fill='#1F5FA8' textAnchor='start' fontFamily='Microsoft YaHei'&gt;2.1 Python 解释器：写的是&quot;食材&quot;，&lt;/text&gt;&lt;text x='82' y='153' fontSize='15.5' fontWeight='bold' fill='#1F5FA8' textAnchor='start' fontFamily='Microsoft YaHei'&gt;跑的是&quot;厨师&quot;&lt;/text&gt;&lt;text x='82' y='192.0' fontSize='13' fill='#3A4A58' textAnchor='start' fontFamily='Microsoft YaHei'&gt;· Python 是一门解释型语言。&lt;/text&gt;&lt;text x='82' y='220.5' fontSize='13' fill='#3A4A58' textAnchor='start' fontFamily='Microsoft YaHei'&gt;· 你写了一张菜谱（.py 文件），&lt;/text&gt;&lt;text x='82' y='240.0' fontSize='13' fill='#3A4A58' textAnchor='start' fontFamily='Microsoft YaHei'&gt;但菜谱不会自己变成菜。&lt;/text&gt;&lt;text x='82' y='268.5' fontSize='13' fill='#3A4A58' textAnchor='start' fontFamily='Microsoft YaHei'&gt;· 理解这一点，你就明白了为什么安装 Python&lt;/text&gt;&lt;text x='82' y='288.0' fontSize='13' fill='#3A4A58' textAnchor='start' fontFamily='Microsoft YaHei'&gt;是第一步——没有厨师，菜谱就是废纸。&lt;/text&gt;&lt;rect x='468' y='96' width='368' height='330' rx='12' fill='#FFFFFF' stroke='#D8E3EE' /&gt;&lt;rect x='468' y='96' width='368' height='4' rx='2' fill='#1F5FA8' /&gt;&lt;text x='486' y='130' fontSize='15.5' fontWeight='bold' fill='#1F5FA8' textAnchor='start' fontFamily='Microsoft YaHei'&gt;2.2 终端（命令行）：和解释器对话的窗口&lt;/text&gt;&lt;text x='486' y='169.0' fontSize='13' fill='#3A4A58' textAnchor='start' fontFamily='Microsoft YaHei'&gt;· cd 文件夹名 —— 进入某个目录（change&lt;/text&gt;&lt;text x='486' y='188.5' fontSize='13' fill='#3A4A58' textAnchor='start' fontFamily='Microsoft YaHei'&gt;directory）&lt;/text&gt;&lt;text x='486' y='217.0' fontSize='13' fill='#3A4A58' textAnchor='start' fontFamily='Microsoft YaHei'&gt;· dir（Windows）或 ls（macOS/Linux）——&lt;/text&gt;&lt;text x='486' y='236.5' fontSize='13' fill='#3A4A58' textAnchor='start' fontFamily='Microsoft YaHei'&gt;列出当前目录里有什么&lt;/text&gt;&lt;rect x='872' y='96' width='368' height='330' rx='12' fill='#FFFFFF' stroke='#D8E3EE' /&gt;&lt;rect x='872' y='96' width='368' height='4' rx='2' fill='#1F5FA8' /&gt;&lt;text x='890' y='130' fontSize='15.5' fontWeight='bold' fill='#1F5FA8' textAnchor='start' fontFamily='Microsoft YaHei'&gt;2.3 VS Code + Python 扩展…&lt;/text&gt;&lt;text x='890' y='169.0' fontSize='13' fill='#3A4A58' textAnchor='start' fontFamily='Microsoft YaHei'&gt;· 右上角的 ▶ 播放按钮，一键运行当前文件&lt;/text&gt;&lt;text x='890' y='197.5' fontSize='13' fill='#3A4A58' textAnchor='start' fontFamily='Microsoft YaHei'&gt;· 智能提示：打了一半的函数名，&lt;/text&gt;&lt;text x='890' y='217.0' fontSize='13' fill='#3A4A58' textAnchor='start' fontFamily='Microsoft YaHei'&gt;会自动补全并显示参数说明&lt;/text&gt;&lt;text x='890' y='245.5' fontSize='13' fill='#3A4A58' textAnchor='start' fontFamily='Microsoft YaHei'&gt;· 错误提示：你在当前文件还没运行之前，&lt;/text&gt;&lt;text x='890' y='265.0' fontSize='13' fill='#3A4A58' textAnchor='start' fontFamily='Microsoft YaHei'&gt;就能看到红波浪线告诉你哪里写错了&lt;/text&gt;&lt;rect x='64' y='574' width='1152' height='66' rx='12' fill='#EEF5FB' /&gt;&lt;text x='84' y='616' fontSize='14' fill='#243444' textAnchor='start' fontFamily='Microsoft YaHei'&gt;看不懂的地方先回讲义对应小节读一遍，再回来对着这页复述一次——能讲出来才算真懂。&lt;/text&gt;&#13;&#10;            &lt;text x='64' y='684' fontSize='13' fill='#8A9AAA' fontFamily='Microsoft YaHei'&gt;Python 讲授课件 · 逐节版&lt;/text&gt;&#13;&#10;            &lt;text x='1216' y='684' fontSize='13' fill='#8A9AAA' textAnchor='end' fontFamily='Microsoft YaHei'&gt;单元 0 · 第 1 节&lt;/text&gt;&#13;&#10;        &lt;/svg&gt;&#13;&#10;    &lt;/Box&gt;&#13;&#10;&lt;/Slide&gt;&#13;&#10;"/>
         <p:cNvGrpSpPr/>
         <p:nvPr/>
       </p:nvGrpSpPr>
@@ -3913,7 +2641,7 @@
   <p:cSld>
     <p:spTree>
       <p:nvGrpSpPr>
-        <p:cNvPr id="55" name="" descr="&lt;Slide style={{ width: '1280px', height: '720px', backgroundColor: '#FAFCFE', padding: 0, position: 'relative', overflow: 'hidden' }}&gt;&#13;&#10;    &lt;Box style={{ position: 'absolute', left: 64, top: 36, width: '1152px', flexDirection: 'row', alignItems: 'center', gap: 12 }}&gt;&#13;&#10;        &lt;Box style={{ background: '#0E9B78', borderRadius: 5, padding: '3px 11px' }}&gt;&#13;&#10;            &lt;Text style={{ fontSize: 14, fontWeight: 'bold', color: '#FFFFFF' }}&gt;第 2 节&lt;/Text&gt;&#13;&#10;        &lt;/Box&gt;&#13;&#10;        &lt;Text style={{ fontSize: 30, fontWeight: 'bold', color: '#16232E' }}&gt;核心知识点&lt;/Text&gt;&#13;&#10;        &lt;Text style={{ fontSize: 15, color: '#5A6B7A', marginTop: 10 }}&gt;· 第一个报错与 Git 拍快照&lt;/Text&gt;&#13;&#10;    &lt;/Box&gt;&#13;&#10;    &lt;Box style={{ position: 'absolute', left: 0, top: 0, width: '1280px', height: '720px' }}&gt;&#13;&#10;        &lt;svg width='1280' height='720' viewBox='0 0 1280 720'&gt;&#13;&#10;            &lt;rect x='64' y='96' width='548' height='330' rx='12' fill='#FFFFFF' stroke='#D8E3EE' /&gt;&lt;rect x='64' y='96' width='548' height='4' rx='2' fill='#1F5FA8' /&gt;&lt;text x='82' y='130' fontSize='15.5' fontWeight='bold' fill='#1F5FA8' textAnchor='start' fontFamily='Microsoft YaHei'&gt;2.4 第一个报错：报错是你的朋友&lt;/text&gt;&lt;text x='82' y='169.0' fontSize='13' fill='#3A4A58' textAnchor='start' fontFamily='Microsoft YaHei'&gt;· File &quot;hello.py&quot;, line 1 —— 哪个文件、第几行&lt;/text&gt;&lt;text x='82' y='197.5' fontSize='13' fill='#3A4A58' textAnchor='start' fontFamily='Microsoft YaHei'&gt;· 那行代码 + 一个 ^ 箭头 —— 箭头指着的就是问题所在&lt;/text&gt;&lt;text x='82' y='226.0' fontSize='13' fill='#3A4A58' textAnchor='start' fontFamily='Microsoft YaHei'&gt;· SyntaxError: '(' was never closed —— 人类语言的错误原因&lt;/text&gt;&lt;rect x='668' y='96' width='548' height='330' rx='12' fill='#FFFFFF' stroke='#D8E3EE' /&gt;&lt;rect x='668' y='96' width='548' height='4' rx='2' fill='#1F5FA8' /&gt;&lt;text x='686' y='130' fontSize='15.5' fontWeight='bold' fill='#1F5FA8' textAnchor='start' fontFamily='Microsoft YaHei'&gt;2.5 Git：给代码拍快照&lt;/text&gt;&lt;text x='686' y='169.0' fontSize='13' fill='#3A4A58' textAnchor='start' fontFamily='Microsoft YaHei'&gt;· Git 是一个版本控制系统，作用是给你的代码拍快照。写崩了可以回到任何一个快照。&lt;/text&gt;&lt;rect x='64' y='574' width='1152' height='66' rx='12' fill='#EEF5FB' /&gt;&lt;text x='84' y='616' fontSize='14' fill='#243444' textAnchor='start' fontFamily='Microsoft YaHei'&gt;看不懂的地方先回讲义对应小节读一遍，再回来对着这页复述一次——能讲出来才算真懂。&lt;/text&gt;&#13;&#10;            &lt;text x='64' y='684' fontSize='13' fill='#8A9AAA' fontFamily='Microsoft YaHei'&gt;Python 讲授课件 · 逐节版&lt;/text&gt;&#13;&#10;            &lt;text x='1216' y='684' fontSize='13' fill='#8A9AAA' textAnchor='end' fontFamily='Microsoft YaHei'&gt;单元 0 · 第 2 节&lt;/text&gt;&#13;&#10;        &lt;/svg&gt;&#13;&#10;    &lt;/Box&gt;&#13;&#10;&lt;/Slide&gt;&#13;&#10;"/>
+        <p:cNvPr id="55" name="" descr="&lt;Slide style={{ width: '1280px', height: '720px', backgroundColor: '#FAFCFE', padding: 0, position: 'relative', overflow: 'hidden' }}&gt;&#13;&#10;    &lt;Box style={{ position: 'absolute', left: 64, top: 36, width: '1152px', flexDirection: 'row', alignItems: 'center', gap: 12 }}&gt;&#13;&#10;        &lt;Box style={{ background: '#0E9B78', borderRadius: 5, padding: '3px 11px' }}&gt;&#13;&#10;            &lt;Text style={{ fontSize: 14, fontWeight: 'bold', color: '#FFFFFF' }}&gt;第 2 节&lt;/Text&gt;&#13;&#10;        &lt;/Box&gt;&#13;&#10;        &lt;Text style={{ fontSize: 30, fontWeight: 'bold', color: '#16232E' }}&gt;核心知识点&lt;/Text&gt;&#13;&#10;        &lt;Text style={{ fontSize: 15, color: '#5A6B7A', marginTop: 10 }}&gt;· 第一个报错与 Git 拍快照&lt;/Text&gt;&#13;&#10;    &lt;/Box&gt;&#13;&#10;    &lt;Box style={{ position: 'absolute', left: 0, top: 0, width: '1280px', height: '720px' }}&gt;&#13;&#10;        &lt;svg width='1280' height='720' viewBox='0 0 1280 720'&gt;&#13;&#10;            &lt;rect x='64' y='96' width='548' height='330' rx='12' fill='#FFFFFF' stroke='#D8E3EE' /&gt;&lt;rect x='64' y='96' width='548' height='4' rx='2' fill='#1F5FA8' /&gt;&lt;text x='82' y='130' fontSize='15.5' fontWeight='bold' fill='#1F5FA8' textAnchor='start' fontFamily='Microsoft YaHei'&gt;2.4 第一个报错：报错是你的朋友&lt;/text&gt;&lt;text x='82' y='169.0' fontSize='13' fill='#3A4A58' textAnchor='start' fontFamily='Microsoft YaHei'&gt;· File &quot;hello.py&quot;, line 1 —— 哪个文件、第几行&lt;/text&gt;&lt;text x='82' y='197.5' fontSize='13' fill='#3A4A58' textAnchor='start' fontFamily='Microsoft YaHei'&gt;· 那行代码 + 一个 ^ 箭头 —— 箭头指着的就是问题所在&lt;/text&gt;&lt;text x='82' y='226.0' fontSize='13' fill='#3A4A58' textAnchor='start' fontFamily='Microsoft YaHei'&gt;· SyntaxError: '(' was never closed —— 人类语言的错误原因&lt;/text&gt;&lt;rect x='668' y='96' width='548' height='330' rx='12' fill='#FFFFFF' stroke='#D8E3EE' /&gt;&lt;rect x='668' y='96' width='548' height='4' rx='2' fill='#1F5FA8' /&gt;&lt;text x='686' y='130' fontSize='15.5' fontWeight='bold' fill='#1F5FA8' textAnchor='start' fontFamily='Microsoft YaHei'&gt;2.5 Git：给代码拍快照&lt;/text&gt;&lt;text x='686' y='169.0' fontSize='13' fill='#3A4A58' textAnchor='start' fontFamily='Microsoft YaHei'&gt;· Git 是一个版本控制系统，作用是给你的代码拍快照。&lt;/text&gt;&lt;rect x='64' y='574' width='1152' height='66' rx='12' fill='#EEF5FB' /&gt;&lt;text x='84' y='616' fontSize='14' fill='#243444' textAnchor='start' fontFamily='Microsoft YaHei'&gt;看不懂的地方先回讲义对应小节读一遍，再回来对着这页复述一次——能讲出来才算真懂。&lt;/text&gt;&#13;&#10;            &lt;text x='64' y='684' fontSize='13' fill='#8A9AAA' fontFamily='Microsoft YaHei'&gt;Python 讲授课件 · 逐节版&lt;/text&gt;&#13;&#10;            &lt;text x='1216' y='684' fontSize='13' fill='#8A9AAA' textAnchor='end' fontFamily='Microsoft YaHei'&gt;单元 0 · 第 2 节&lt;/text&gt;&#13;&#10;        &lt;/svg&gt;&#13;&#10;    &lt;/Box&gt;&#13;&#10;&lt;/Slide&gt;&#13;&#10;"/>
         <p:cNvGrpSpPr/>
         <p:nvPr/>
       </p:nvGrpSpPr>
@@ -4384,7 +3112,7 @@
   <p:cSld>
     <p:spTree>
       <p:nvGrpSpPr>
-        <p:cNvPr id="68" name="" descr="&lt;Slide style={{ width: '1280px', height: '720px', backgroundColor: '#FAFCFE', padding: 0, position: 'relative', overflow: 'hidden' }}&gt;&#13;&#10;    &lt;Box style={{ position: 'absolute', left: 64, top: 36, width: '1152px', flexDirection: 'row', alignItems: 'center', gap: 12 }}&gt;&#13;&#10;        &lt;Box style={{ background: '#0E9B78', borderRadius: 5, padding: '3px 11px' }}&gt;&#13;&#10;            &lt;Text style={{ fontSize: 14, fontWeight: 'bold', color: '#FFFFFF' }}&gt;第 3 节&lt;/Text&gt;&#13;&#10;        &lt;/Box&gt;&#13;&#10;        &lt;Text style={{ fontSize: 30, fontWeight: 'bold', color: '#16232E' }}&gt;核心知识点&lt;/Text&gt;&#13;&#10;        &lt;Text style={{ fontSize: 15, color: '#5A6B7A', marginTop: 10 }}&gt;· 目录结构、print 与注释&lt;/Text&gt;&#13;&#10;    &lt;/Box&gt;&#13;&#10;    &lt;Box style={{ position: 'absolute', left: 0, top: 0, width: '1280px', height: '720px' }}&gt;&#13;&#10;        &lt;svg width='1280' height='720' viewBox='0 0 1280 720'&gt;&#13;&#10;            &lt;rect x='64' y='96' width='1152' height='330' rx='12' fill='#FFFFFF' stroke='#D8E3EE' /&gt;&lt;rect x='64' y='96' width='1152' height='4' rx='2' fill='#1F5FA8' /&gt;&lt;text x='82' y='130' fontSize='15.5' fontWeight='bold' fill='#1F5FA8' textAnchor='start' fontFamily='Microsoft YaHei'&gt;2.6 建议的目录结构&lt;/text&gt;&lt;text x='82' y='169.0' fontSize='13' fill='#3A4A58' textAnchor='start' fontFamily='Microsoft YaHei'&gt;· 从第一天起就养成&quot;一个项目一个文件夹&quot;的习惯，单元 10 开始你会立刻感谢自己：&lt;/text&gt;&lt;text x='64' y='470' fontSize='14.5' fontWeight='bold' fill='#0E9B78' textAnchor='start' fontFamily='Microsoft YaHei'&gt;本节的代码示例&lt;/text&gt;&lt;text x='64' y='500' fontSize='13' fill='#3A4A58' textAnchor='start' fontFamily='Microsoft YaHei'&gt;· 第一个脚本&lt;/text&gt;&lt;text x='468' y='500' fontSize='13' fill='#3A4A58' textAnchor='start' fontFamily='Microsoft YaHei'&gt;· 先写后跑的顺序演示（体会&quot;从上到下&quot;）&lt;/text&gt;&lt;text x='872' y='500' fontSize='13' fill='#3A4A58' textAnchor='start' fontFamily='Microsoft YaHei'&gt;· 用变量做一次简单计算&lt;/text&gt;&lt;rect x='64' y='574' width='1152' height='66' rx='12' fill='#EEF5FB' /&gt;&lt;text x='84' y='616' fontSize='14' fill='#243444' textAnchor='start' fontFamily='Microsoft YaHei'&gt;看不懂的地方先回讲义对应小节读一遍，再回来对着这页复述一次——能讲出来才算真懂。&lt;/text&gt;&#13;&#10;            &lt;text x='64' y='684' fontSize='13' fill='#8A9AAA' fontFamily='Microsoft YaHei'&gt;Python 讲授课件 · 逐节版&lt;/text&gt;&#13;&#10;            &lt;text x='1216' y='684' fontSize='13' fill='#8A9AAA' textAnchor='end' fontFamily='Microsoft YaHei'&gt;单元 0 · 第 3 节&lt;/text&gt;&#13;&#10;        &lt;/svg&gt;&#13;&#10;    &lt;/Box&gt;&#13;&#10;&lt;/Slide&gt;&#13;&#10;"/>
+        <p:cNvPr id="68" name="" descr="&lt;Slide style={{ width: '1280px', height: '720px', backgroundColor: '#FAFCFE', padding: 0, position: 'relative', overflow: 'hidden' }}&gt;&#13;&#10;    &lt;Box style={{ position: 'absolute', left: 64, top: 36, width: '1152px', flexDirection: 'row', alignItems: 'center', gap: 12 }}&gt;&#13;&#10;        &lt;Box style={{ background: '#0E9B78', borderRadius: 5, padding: '3px 11px' }}&gt;&#13;&#10;            &lt;Text style={{ fontSize: 14, fontWeight: 'bold', color: '#FFFFFF' }}&gt;第 3 节&lt;/Text&gt;&#13;&#10;        &lt;/Box&gt;&#13;&#10;        &lt;Text style={{ fontSize: 30, fontWeight: 'bold', color: '#16232E' }}&gt;核心知识点&lt;/Text&gt;&#13;&#10;        &lt;Text style={{ fontSize: 15, color: '#5A6B7A', marginTop: 10 }}&gt;· 目录结构、print 与注释&lt;/Text&gt;&#13;&#10;    &lt;/Box&gt;&#13;&#10;    &lt;Box style={{ position: 'absolute', left: 0, top: 0, width: '1280px', height: '720px' }}&gt;&#13;&#10;        &lt;svg width='1280' height='720' viewBox='0 0 1280 720'&gt;&#13;&#10;            &lt;text x='64' y='470' fontSize='14.5' fontWeight='bold' fill='#0E9B78' textAnchor='start' fontFamily='Microsoft YaHei'&gt;本节的代码示例&lt;/text&gt;&lt;text x='64' y='500' fontSize='13' fill='#3A4A58' textAnchor='start' fontFamily='Microsoft YaHei'&gt;· 第一个脚本&lt;/text&gt;&lt;text x='468' y='500' fontSize='13' fill='#3A4A58' textAnchor='start' fontFamily='Microsoft YaHei'&gt;· 先写后跑的顺序演示（体会&quot;从上到下&quot;）&lt;/text&gt;&lt;text x='872' y='500' fontSize='13' fill='#3A4A58' textAnchor='start' fontFamily='Microsoft YaHei'&gt;· 用变量做一次简单计算&lt;/text&gt;&lt;rect x='64' y='574' width='1152' height='66' rx='12' fill='#EEF5FB' /&gt;&lt;text x='84' y='616' fontSize='14' fill='#243444' textAnchor='start' fontFamily='Microsoft YaHei'&gt;看不懂的地方先回讲义对应小节读一遍，再回来对着这页复述一次——能讲出来才算真懂。&lt;/text&gt;&#13;&#10;            &lt;text x='64' y='684' fontSize='13' fill='#8A9AAA' fontFamily='Microsoft YaHei'&gt;Python 讲授课件 · 逐节版&lt;/text&gt;&#13;&#10;            &lt;text x='1216' y='684' fontSize='13' fill='#8A9AAA' textAnchor='end' fontFamily='Microsoft YaHei'&gt;单元 0 · 第 3 节&lt;/text&gt;&#13;&#10;        &lt;/svg&gt;&#13;&#10;    &lt;/Box&gt;&#13;&#10;&lt;/Slide&gt;&#13;&#10;"/>
         <p:cNvGrpSpPr/>
         <p:nvPr/>
       </p:nvGrpSpPr>
@@ -4835,7 +3563,7 @@
   <p:cSld>
     <p:spTree>
       <p:nvGrpSpPr>
-        <p:cNvPr id="81" name="" descr="&lt;Slide style={{ width: '1280px', height: '720px', backgroundColor: '#FAFCFE', padding: 0, position: 'relative', overflow: 'hidden' }}&gt;&#13;&#10;    &lt;Box style={{ position: 'absolute', left: 64, top: 36, width: '1152px', flexDirection: 'row', alignItems: 'center', gap: 12 }}&gt;&#13;&#10;        &lt;Box style={{ background: '#0E9B78', borderRadius: 5, padding: '3px 11px' }}&gt;&#13;&#10;            &lt;Text style={{ fontSize: 14, fontWeight: 'bold', color: '#FFFFFF' }}&gt;第 4 节&lt;/Text&gt;&#13;&#10;        &lt;/Box&gt;&#13;&#10;        &lt;Text style={{ fontSize: 30, fontWeight: 'bold', color: '#16232E' }}&gt;核心知识点&lt;/Text&gt;&#13;&#10;        &lt;Text style={{ fontSize: 15, color: '#5A6B7A', marginTop: 10 }}&gt;· 动手实战与答案讲评&lt;/Text&gt;&#13;&#10;    &lt;/Box&gt;&#13;&#10;    &lt;Box style={{ position: 'absolute', left: 0, top: 0, width: '1280px', height: '720px' }}&gt;&#13;&#10;        &lt;svg width='1280' height='720' viewBox='0 0 1280 720'&gt;&#13;&#10;            &lt;rect x='64' y='96' width='368' height='330' rx='12' fill='#FFFFFF' stroke='#D8E3EE' /&gt;&lt;rect x='64' y='96' width='368' height='4' rx='2' fill='#1F5FA8' /&gt;&lt;text x='82' y='130' fontSize='15.5' fontWeight='bold' fill='#1F5FA8' textAnchor='start' fontFamily='Microsoft YaHei'&gt;基础档&lt;/text&gt;&lt;text x='82' y='169.0' fontSize='13' fill='#3A4A58' textAnchor='start' fontFamily='Microsoft YaHei'&gt;· 练习 0-1【环境验证】&lt;/text&gt;&lt;text x='82' y='197.5' fontSize='13' fill='#3A4A58' textAnchor='start' fontFamily='Microsoft YaHei'&gt;· 练习 0-2【第一个变量】&lt;/text&gt;&lt;text x='82' y='226.0' fontSize='13' fill='#3A4A58' textAnchor='start' fontFamily='Microsoft YaHei'&gt;· 练习 0-3【f-string 自我介绍】&lt;/text&gt;&lt;rect x='468' y='96' width='368' height='330' rx='12' fill='#FFFFFF' stroke='#D8E3EE' /&gt;&lt;rect x='468' y='96' width='368' height='4' rx='2' fill='#1F5FA8' /&gt;&lt;text x='486' y='130' fontSize='15.5' fontWeight='bold' fill='#1F5FA8' textAnchor='start' fontFamily='Microsoft YaHei'&gt;进阶档&lt;/text&gt;&lt;text x='486' y='169.0' fontSize='13' fill='#3A4A58' textAnchor='start' fontFamily='Microsoft YaHei'&gt;· 练习 0-5🌐【第一个交互程序】&lt;/text&gt;&lt;text x='486' y='197.5' fontSize='13' fill='#3A4A58' textAnchor='start' fontFamily='Microsoft YaHei'&gt;· 练习 0-6【批量注释与规范】&lt;/text&gt;&lt;text x='486' y='226.0' fontSize='13' fill='#3A4A58' textAnchor='start' fontFamily='Microsoft YaHei'&gt;· 练习 0-7【错误修复】&lt;/text&gt;&lt;rect x='872' y='96' width='368' height='330' rx='12' fill='#FFFFFF' stroke='#D8E3EE' /&gt;&lt;rect x='872' y='96' width='368' height='4' rx='2' fill='#1F5FA8' /&gt;&lt;text x='890' y='130' fontSize='15.5' fontWeight='bold' fill='#1F5FA8' textAnchor='start' fontFamily='Microsoft YaHei'&gt;参考答案 0-2&lt;/text&gt;&lt;text x='890' y='169.0' fontSize='13' fill='#3A4A58' textAnchor='start' fontFamily='Microsoft YaHei'&gt;· name = &quot;小明&quot; # str：字符串，用引号包起来的文字&lt;/text&gt;&lt;rect x='64' y='574' width='1152' height='66' rx='12' fill='#EEF5FB' /&gt;&lt;text x='84' y='616' fontSize='14' fill='#243444' textAnchor='start' fontFamily='Microsoft YaHei'&gt;看不懂的地方先回讲义对应小节读一遍，再回来对着这页复述一次——能讲出来才算真懂。&lt;/text&gt;&#13;&#10;            &lt;text x='64' y='684' fontSize='13' fill='#8A9AAA' fontFamily='Microsoft YaHei'&gt;Python 讲授课件 · 逐节版&lt;/text&gt;&#13;&#10;            &lt;text x='1216' y='684' fontSize='13' fill='#8A9AAA' textAnchor='end' fontFamily='Microsoft YaHei'&gt;单元 0 · 第 4 节&lt;/text&gt;&#13;&#10;        &lt;/svg&gt;&#13;&#10;    &lt;/Box&gt;&#13;&#10;&lt;/Slide&gt;&#13;&#10;"/>
+        <p:cNvPr id="81" name="" descr="&lt;Slide style={{ width: '1280px', height: '720px', backgroundColor: '#FAFCFE', padding: 0, position: 'relative', overflow: 'hidden' }}&gt;&#13;&#10;    &lt;Box style={{ position: 'absolute', left: 64, top: 36, width: '1152px', flexDirection: 'row', alignItems: 'center', gap: 12 }}&gt;&#13;&#10;        &lt;Box style={{ background: '#0E9B78', borderRadius: 5, padding: '3px 11px' }}&gt;&#13;&#10;            &lt;Text style={{ fontSize: 14, fontWeight: 'bold', color: '#FFFFFF' }}&gt;第 4 节&lt;/Text&gt;&#13;&#10;        &lt;/Box&gt;&#13;&#10;        &lt;Text style={{ fontSize: 30, fontWeight: 'bold', color: '#16232E' }}&gt;核心知识点&lt;/Text&gt;&#13;&#10;        &lt;Text style={{ fontSize: 15, color: '#5A6B7A', marginTop: 10 }}&gt;· 动手实战与答案讲评&lt;/Text&gt;&#13;&#10;    &lt;/Box&gt;&#13;&#10;    &lt;Box style={{ position: 'absolute', left: 0, top: 0, width: '1280px', height: '720px' }}&gt;&#13;&#10;        &lt;svg width='1280' height='720' viewBox='0 0 1280 720'&gt;&#13;&#10;            &lt;rect x='64' y='96' width='368' height='330' rx='12' fill='#FFFFFF' stroke='#D8E3EE' /&gt;&lt;rect x='64' y='96' width='368' height='4' rx='2' fill='#1F5FA8' /&gt;&lt;text x='82' y='130' fontSize='15.5' fontWeight='bold' fill='#1F5FA8' textAnchor='start' fontFamily='Microsoft YaHei'&gt;基础档&lt;/text&gt;&lt;text x='82' y='169.0' fontSize='13' fill='#3A4A58' textAnchor='start' fontFamily='Microsoft YaHei'&gt;· 练习 0-1【环境验证】&lt;/text&gt;&lt;text x='82' y='197.5' fontSize='13' fill='#3A4A58' textAnchor='start' fontFamily='Microsoft YaHei'&gt;· 练习 0-2【第一个变量】&lt;/text&gt;&lt;text x='82' y='226.0' fontSize='13' fill='#3A4A58' textAnchor='start' fontFamily='Microsoft YaHei'&gt;· 练习 0-3【f-string 自我介绍】&lt;/text&gt;&lt;rect x='468' y='96' width='368' height='330' rx='12' fill='#FFFFFF' stroke='#D8E3EE' /&gt;&lt;rect x='468' y='96' width='368' height='4' rx='2' fill='#1F5FA8' /&gt;&lt;text x='486' y='130' fontSize='15.5' fontWeight='bold' fill='#1F5FA8' textAnchor='start' fontFamily='Microsoft YaHei'&gt;进阶档&lt;/text&gt;&lt;text x='486' y='169.0' fontSize='13' fill='#3A4A58' textAnchor='start' fontFamily='Microsoft YaHei'&gt;· 练习 0-5🌐【第一个交互程序】&lt;/text&gt;&lt;text x='486' y='197.5' fontSize='13' fill='#3A4A58' textAnchor='start' fontFamily='Microsoft YaHei'&gt;· 练习 0-6【批量注释与规范】&lt;/text&gt;&lt;text x='486' y='226.0' fontSize='13' fill='#3A4A58' textAnchor='start' fontFamily='Microsoft YaHei'&gt;· 练习 0-7【错误修复】&lt;/text&gt;&lt;rect x='872' y='96' width='368' height='330' rx='12' fill='#FFFFFF' stroke='#D8E3EE' /&gt;&lt;rect x='872' y='96' width='368' height='4' rx='2' fill='#1F5FA8' /&gt;&lt;text x='890' y='130' fontSize='15.5' fontWeight='bold' fill='#1F5FA8' textAnchor='start' fontFamily='Microsoft YaHei'&gt;参考答案 0-5&lt;/text&gt;&lt;text x='890' y='169.0' fontSize='13' fill='#3A4A58' textAnchor='start' fontFamily='Microsoft YaHei'&gt;· 如果用户输入的是 abc，int(&quot;abc&quot;) 会报&lt;/text&gt;&lt;text x='890' y='188.5' fontSize='13' fill='#3A4A58' textAnchor='start' fontFamily='Microsoft YaHei'&gt;ValueError，这是正常的…&lt;/text&gt;&lt;rect x='64' y='574' width='1152' height='66' rx='12' fill='#EEF5FB' /&gt;&lt;text x='84' y='616' fontSize='14' fill='#243444' textAnchor='start' fontFamily='Microsoft YaHei'&gt;看不懂的地方先回讲义对应小节读一遍，再回来对着这页复述一次——能讲出来才算真懂。&lt;/text&gt;&#13;&#10;            &lt;text x='64' y='684' fontSize='13' fill='#8A9AAA' fontFamily='Microsoft YaHei'&gt;Python 讲授课件 · 逐节版&lt;/text&gt;&#13;&#10;            &lt;text x='1216' y='684' fontSize='13' fill='#8A9AAA' textAnchor='end' fontFamily='Microsoft YaHei'&gt;单元 0 · 第 4 节&lt;/text&gt;&#13;&#10;        &lt;/svg&gt;&#13;&#10;    &lt;/Box&gt;&#13;&#10;&lt;/Slide&gt;&#13;&#10;"/>
         <p:cNvGrpSpPr/>
         <p:nvPr/>
       </p:nvGrpSpPr>

--- a/python-course-ppt/逐节课件/Python讲授课件-单元00.pptx
+++ b/python-course-ppt/逐节课件/Python讲授课件-单元00.pptx
@@ -236,6 +236,1278 @@
     </a:lvl9pPr>
   </p:notesStyle>
 </p:notesMaster>
+</file>
+
+<file path=ppt/notesSlides/notesSlide1.xml><?xml version="1.0" encoding="utf-8"?>
+<p:notes xmlns:a="http://schemas.openxmlformats.org/drawingml/2006/main" xmlns:p="http://schemas.openxmlformats.org/presentationml/2006/main" xmlns:r="http://schemas.openxmlformats.org/officeDocument/2006/relationships">
+  <p:cSld>
+    <p:spTree>
+      <p:nvGrpSpPr>
+        <p:cNvPr id="1" name=""/>
+        <p:cNvGrpSpPr/>
+        <p:nvPr/>
+      </p:nvGrpSpPr>
+      <p:grpSpPr>
+        <a:xfrm>
+          <a:off x="0" y="0"/>
+          <a:ext cx="0" cy="0"/>
+          <a:chOff x="0" y="0"/>
+          <a:chExt cx="0" cy="0"/>
+        </a:xfrm>
+      </p:grpSpPr>
+      <p:sp>
+        <p:nvSpPr>
+          <p:cNvPr id="2" name="讲课提示"/>
+          <p:cNvSpPr txBox="1"/>
+          <p:nvPr/>
+        </p:nvSpPr>
+        <p:spPr>
+          <a:xfrm>
+            <a:off x="457200" y="457200"/>
+            <a:ext cx="6858000" cy="4800600"/>
+          </a:xfrm>
+          <a:prstGeom prst="rect">
+            <a:avLst/>
+          </a:prstGeom>
+        </p:spPr>
+        <p:txBody>
+          <a:bodyPr wrap="square"/>
+          <a:lstStyle/>
+          <a:p>
+            <a:r>
+              <a:rPr lang="zh-CN" dirty="0"/>
+              <a:t>单元 0 · 单元 0 · 环境与工具链</a:t>
+            </a:r>
+          </a:p>
+          <a:p>
+            <a:r>
+              <a:rPr lang="zh-CN" dirty="0"/>
+              <a:t/>
+            </a:r>
+          </a:p>
+          <a:p>
+            <a:r>
+              <a:rPr lang="zh-CN" dirty="0"/>
+              <a:t>本单元包含以下课节：</a:t>
+            </a:r>
+          </a:p>
+          <a:p>
+            <a:r>
+              <a:rPr lang="zh-CN" dirty="0"/>
+              <a:t>· 第 1 节 装好 Python 与 VS Code</a:t>
+            </a:r>
+          </a:p>
+          <a:p>
+            <a:r>
+              <a:rPr lang="zh-CN" dirty="0"/>
+              <a:t>· 第 2 节 第一个报错与 Git 拍快照</a:t>
+            </a:r>
+          </a:p>
+          <a:p>
+            <a:r>
+              <a:rPr lang="zh-CN" dirty="0"/>
+              <a:t>· 第 3 节 目录结构、print 与注释</a:t>
+            </a:r>
+          </a:p>
+          <a:p>
+            <a:r>
+              <a:rPr lang="zh-CN" dirty="0"/>
+              <a:t>· 第 4 节 动手实战与答案讲评</a:t>
+            </a:r>
+          </a:p>
+          <a:p>
+            <a:r>
+              <a:rPr lang="zh-CN" dirty="0"/>
+              <a:t>· 第 5 节 单元 0 验收复盘</a:t>
+            </a:r>
+          </a:p>
+          <a:p>
+            <a:r>
+              <a:rPr lang="zh-CN" dirty="0"/>
+              <a:t/>
+            </a:r>
+          </a:p>
+          <a:p>
+            <a:r>
+              <a:rPr lang="zh-CN" dirty="0"/>
+              <a:t>开场用 3 分钟讲清：这个单元学完能做出什么，最后会被关卡怎么验。</a:t>
+            </a:r>
+          </a:p>
+        </p:txBody>
+      </p:sp>
+    </p:spTree>
+  </p:cSld>
+  <p:clrMapOvr>
+    <a:masterClrMapping/>
+  </p:clrMapOvr>
+</p:notes>
+</file>
+
+<file path=ppt/notesSlides/notesSlide10.xml><?xml version="1.0" encoding="utf-8"?>
+<p:notes xmlns:a="http://schemas.openxmlformats.org/drawingml/2006/main" xmlns:p="http://schemas.openxmlformats.org/presentationml/2006/main" xmlns:r="http://schemas.openxmlformats.org/officeDocument/2006/relationships">
+  <p:cSld>
+    <p:spTree>
+      <p:nvGrpSpPr>
+        <p:cNvPr id="1" name=""/>
+        <p:cNvGrpSpPr/>
+        <p:nvPr/>
+      </p:nvGrpSpPr>
+      <p:grpSpPr>
+        <a:xfrm>
+          <a:off x="0" y="0"/>
+          <a:ext cx="0" cy="0"/>
+          <a:chOff x="0" y="0"/>
+          <a:chExt cx="0" cy="0"/>
+        </a:xfrm>
+      </p:grpSpPr>
+      <p:sp>
+        <p:nvSpPr>
+          <p:cNvPr id="2" name="讲课提示"/>
+          <p:cNvSpPr txBox="1"/>
+          <p:nvPr/>
+        </p:nvSpPr>
+        <p:spPr>
+          <a:xfrm>
+            <a:off x="457200" y="457200"/>
+            <a:ext cx="6858000" cy="4800600"/>
+          </a:xfrm>
+          <a:prstGeom prst="rect">
+            <a:avLst/>
+          </a:prstGeom>
+        </p:spPr>
+        <p:txBody>
+          <a:bodyPr wrap="square"/>
+          <a:lstStyle/>
+          <a:p>
+            <a:r>
+              <a:rPr lang="zh-CN" dirty="0"/>
+              <a:t>第 5 节 · 单元 0 验收复盘</a:t>
+            </a:r>
+          </a:p>
+          <a:p>
+            <a:r>
+              <a:rPr lang="zh-CN" dirty="0"/>
+              <a:t>单元 0 · 环境与工具链 · W0</a:t>
+            </a:r>
+          </a:p>
+          <a:p>
+            <a:r>
+              <a:rPr lang="zh-CN" dirty="0"/>
+              <a:t/>
+            </a:r>
+          </a:p>
+          <a:p>
+            <a:r>
+              <a:rPr lang="zh-CN" dirty="0"/>
+              <a:t>学习目标：确认环境、终端、Git、目录结构四项都掌握</a:t>
+            </a:r>
+          </a:p>
+          <a:p>
+            <a:r>
+              <a:rPr lang="zh-CN" dirty="0"/>
+              <a:t/>
+            </a:r>
+          </a:p>
+          <a:p>
+            <a:r>
+              <a:rPr lang="zh-CN" dirty="0"/>
+              <a:t>课堂实操（40 分钟，不看答案）：</a:t>
+            </a:r>
+          </a:p>
+          <a:p>
+            <a:r>
+              <a:rPr lang="zh-CN" dirty="0"/>
+              <a:t>· 逐条打勾验收自测</a:t>
+            </a:r>
+          </a:p>
+          <a:p>
+            <a:r>
+              <a:rPr lang="zh-CN" dirty="0"/>
+              <a:t>· 把没过的项写成补齐计划</a:t>
+            </a:r>
+          </a:p>
+          <a:p>
+            <a:r>
+              <a:rPr lang="zh-CN" dirty="0"/>
+              <a:t/>
+            </a:r>
+          </a:p>
+          <a:p>
+            <a:r>
+              <a:rPr lang="zh-CN" dirty="0"/>
+              <a:t>课后作业：</a:t>
+            </a:r>
+          </a:p>
+          <a:p>
+            <a:r>
+              <a:rPr lang="zh-CN" dirty="0"/>
+              <a:t>· 完成本单元小结与产出检查</a:t>
+            </a:r>
+          </a:p>
+          <a:p>
+            <a:r>
+              <a:rPr lang="zh-CN" dirty="0"/>
+              <a:t/>
+            </a:r>
+          </a:p>
+          <a:p>
+            <a:r>
+              <a:rPr lang="zh-CN" dirty="0"/>
+              <a:t>节奏：讲 20 分钟 → 学员自己敲 40 分钟（不看答案）→ 对讲评自查 20 分钟 → 写作业 10 分钟。</a:t>
+            </a:r>
+          </a:p>
+        </p:txBody>
+      </p:sp>
+    </p:spTree>
+  </p:cSld>
+  <p:clrMapOvr>
+    <a:masterClrMapping/>
+  </p:clrMapOvr>
+</p:notes>
+</file>
+
+<file path=ppt/notesSlides/notesSlide11.xml><?xml version="1.0" encoding="utf-8"?>
+<p:notes xmlns:a="http://schemas.openxmlformats.org/drawingml/2006/main" xmlns:p="http://schemas.openxmlformats.org/presentationml/2006/main" xmlns:r="http://schemas.openxmlformats.org/officeDocument/2006/relationships">
+  <p:cSld>
+    <p:spTree>
+      <p:nvGrpSpPr>
+        <p:cNvPr id="1" name=""/>
+        <p:cNvGrpSpPr/>
+        <p:nvPr/>
+      </p:nvGrpSpPr>
+      <p:grpSpPr>
+        <a:xfrm>
+          <a:off x="0" y="0"/>
+          <a:ext cx="0" cy="0"/>
+          <a:chOff x="0" y="0"/>
+          <a:chExt cx="0" cy="0"/>
+        </a:xfrm>
+      </p:grpSpPr>
+      <p:sp>
+        <p:nvSpPr>
+          <p:cNvPr id="2" name="讲课提示"/>
+          <p:cNvSpPr txBox="1"/>
+          <p:nvPr/>
+        </p:nvSpPr>
+        <p:spPr>
+          <a:xfrm>
+            <a:off x="457200" y="457200"/>
+            <a:ext cx="6858000" cy="4800600"/>
+          </a:xfrm>
+          <a:prstGeom prst="rect">
+            <a:avLst/>
+          </a:prstGeom>
+        </p:spPr>
+        <p:txBody>
+          <a:bodyPr wrap="square"/>
+          <a:lstStyle/>
+          <a:p>
+            <a:r>
+              <a:rPr lang="zh-CN" dirty="0"/>
+              <a:t>第 5 节 · 核心知识点：单元 0 验收复盘</a:t>
+            </a:r>
+          </a:p>
+          <a:p>
+            <a:r>
+              <a:rPr lang="zh-CN" dirty="0"/>
+              <a:t/>
+            </a:r>
+          </a:p>
+          <a:p>
+            <a:r>
+              <a:rPr lang="zh-CN" dirty="0"/>
+              <a:t>讲这一页时：先让学生说出上节课的结论，再逐块讲要点。</a:t>
+            </a:r>
+          </a:p>
+          <a:p>
+            <a:r>
+              <a:rPr lang="zh-CN" dirty="0"/>
+              <a:t>每讲完一块，问一句「这一步如果写错了，报错会长什么样？」——把错误提前讲。</a:t>
+            </a:r>
+          </a:p>
+          <a:p>
+            <a:r>
+              <a:rPr lang="zh-CN" dirty="0"/>
+              <a:t/>
+            </a:r>
+          </a:p>
+          <a:p>
+            <a:r>
+              <a:rPr lang="zh-CN" dirty="0"/>
+              <a:t>本节目标：确认环境、终端、Git、目录结构四项都掌握</a:t>
+            </a:r>
+          </a:p>
+          <a:p>
+            <a:r>
+              <a:rPr lang="zh-CN" dirty="0"/>
+              <a:t/>
+            </a:r>
+          </a:p>
+          <a:p>
+            <a:r>
+              <a:rPr lang="zh-CN" dirty="0"/>
+              <a:t>看不到懂的地方，回讲义对应小节读一遍，再回来对着这页复述一次——能讲出来才算真懂。</a:t>
+            </a:r>
+          </a:p>
+        </p:txBody>
+      </p:sp>
+    </p:spTree>
+  </p:cSld>
+  <p:clrMapOvr>
+    <a:masterClrMapping/>
+  </p:clrMapOvr>
+</p:notes>
+</file>
+
+<file path=ppt/notesSlides/notesSlide12.xml><?xml version="1.0" encoding="utf-8"?>
+<p:notes xmlns:a="http://schemas.openxmlformats.org/drawingml/2006/main" xmlns:p="http://schemas.openxmlformats.org/presentationml/2006/main" xmlns:r="http://schemas.openxmlformats.org/officeDocument/2006/relationships">
+  <p:cSld>
+    <p:spTree>
+      <p:nvGrpSpPr>
+        <p:cNvPr id="1" name=""/>
+        <p:cNvGrpSpPr/>
+        <p:nvPr/>
+      </p:nvGrpSpPr>
+      <p:grpSpPr>
+        <a:xfrm>
+          <a:off x="0" y="0"/>
+          <a:ext cx="0" cy="0"/>
+          <a:chOff x="0" y="0"/>
+          <a:chExt cx="0" cy="0"/>
+        </a:xfrm>
+      </p:grpSpPr>
+      <p:sp>
+        <p:nvSpPr>
+          <p:cNvPr id="2" name="讲课提示"/>
+          <p:cNvSpPr txBox="1"/>
+          <p:nvPr/>
+        </p:nvSpPr>
+        <p:spPr>
+          <a:xfrm>
+            <a:off x="457200" y="457200"/>
+            <a:ext cx="6858000" cy="4800600"/>
+          </a:xfrm>
+          <a:prstGeom prst="rect">
+            <a:avLst/>
+          </a:prstGeom>
+        </p:spPr>
+        <p:txBody>
+          <a:bodyPr wrap="square"/>
+          <a:lstStyle/>
+          <a:p>
+            <a:r>
+              <a:rPr lang="zh-CN" dirty="0"/>
+              <a:t>单元 0 小结 · 单元 0 · 小结</a:t>
+            </a:r>
+          </a:p>
+          <a:p>
+            <a:r>
+              <a:rPr lang="zh-CN" dirty="0"/>
+              <a:t/>
+            </a:r>
+          </a:p>
+          <a:p>
+            <a:r>
+              <a:rPr lang="zh-CN" dirty="0"/>
+              <a:t>收尾动作：让学生合上讲义，口述本单元三个最重要的结论；说不出来的，回对应课节。</a:t>
+            </a:r>
+          </a:p>
+          <a:p>
+            <a:r>
+              <a:rPr lang="zh-CN" dirty="0"/>
+              <a:t>然后当场勾一遍本单元课节的「已完成」，没打勾的进下一单元前补掉。</a:t>
+            </a:r>
+          </a:p>
+        </p:txBody>
+      </p:sp>
+    </p:spTree>
+  </p:cSld>
+  <p:clrMapOvr>
+    <a:masterClrMapping/>
+  </p:clrMapOvr>
+</p:notes>
+</file>
+
+<file path=ppt/notesSlides/notesSlide2.xml><?xml version="1.0" encoding="utf-8"?>
+<p:notes xmlns:a="http://schemas.openxmlformats.org/drawingml/2006/main" xmlns:p="http://schemas.openxmlformats.org/presentationml/2006/main" xmlns:r="http://schemas.openxmlformats.org/officeDocument/2006/relationships">
+  <p:cSld>
+    <p:spTree>
+      <p:nvGrpSpPr>
+        <p:cNvPr id="1" name=""/>
+        <p:cNvGrpSpPr/>
+        <p:nvPr/>
+      </p:nvGrpSpPr>
+      <p:grpSpPr>
+        <a:xfrm>
+          <a:off x="0" y="0"/>
+          <a:ext cx="0" cy="0"/>
+          <a:chOff x="0" y="0"/>
+          <a:chExt cx="0" cy="0"/>
+        </a:xfrm>
+      </p:grpSpPr>
+      <p:sp>
+        <p:nvSpPr>
+          <p:cNvPr id="2" name="讲课提示"/>
+          <p:cNvSpPr txBox="1"/>
+          <p:nvPr/>
+        </p:nvSpPr>
+        <p:spPr>
+          <a:xfrm>
+            <a:off x="457200" y="457200"/>
+            <a:ext cx="6858000" cy="4800600"/>
+          </a:xfrm>
+          <a:prstGeom prst="rect">
+            <a:avLst/>
+          </a:prstGeom>
+        </p:spPr>
+        <p:txBody>
+          <a:bodyPr wrap="square"/>
+          <a:lstStyle/>
+          <a:p>
+            <a:r>
+              <a:rPr lang="zh-CN" dirty="0"/>
+              <a:t>第 1 节 · 装好 Python 与 VS Code</a:t>
+            </a:r>
+          </a:p>
+          <a:p>
+            <a:r>
+              <a:rPr lang="zh-CN" dirty="0"/>
+              <a:t>单元 0 · 环境与工具链 · W0</a:t>
+            </a:r>
+          </a:p>
+          <a:p>
+            <a:r>
+              <a:rPr lang="zh-CN" dirty="0"/>
+              <a:t/>
+            </a:r>
+          </a:p>
+          <a:p>
+            <a:r>
+              <a:rPr lang="zh-CN" dirty="0"/>
+              <a:t>学习目标：知道解释器是什么，能新建并运行第一个脚本</a:t>
+            </a:r>
+          </a:p>
+          <a:p>
+            <a:r>
+              <a:rPr lang="zh-CN" dirty="0"/>
+              <a:t/>
+            </a:r>
+          </a:p>
+          <a:p>
+            <a:r>
+              <a:rPr lang="zh-CN" dirty="0"/>
+              <a:t>课堂实操（40 分钟，不看答案）：</a:t>
+            </a:r>
+          </a:p>
+          <a:p>
+            <a:r>
+              <a:rPr lang="zh-CN" dirty="0"/>
+              <a:t>· 跟着敲：新建 hello.py 并运行</a:t>
+            </a:r>
+          </a:p>
+          <a:p>
+            <a:r>
+              <a:rPr lang="zh-CN" dirty="0"/>
+              <a:t>· 故意写错一次，观察报错长什么样</a:t>
+            </a:r>
+          </a:p>
+          <a:p>
+            <a:r>
+              <a:rPr lang="zh-CN" dirty="0"/>
+              <a:t>· 用终端直接运行 python hello.py</a:t>
+            </a:r>
+          </a:p>
+          <a:p>
+            <a:r>
+              <a:rPr lang="zh-CN" dirty="0"/>
+              <a:t/>
+            </a:r>
+          </a:p>
+          <a:p>
+            <a:r>
+              <a:rPr lang="zh-CN" dirty="0"/>
+              <a:t>课后作业：</a:t>
+            </a:r>
+          </a:p>
+          <a:p>
+            <a:r>
+              <a:rPr lang="zh-CN" dirty="0"/>
+              <a:t>· 装好环境并跑通 hello.py</a:t>
+            </a:r>
+          </a:p>
+          <a:p>
+            <a:r>
+              <a:rPr lang="zh-CN" dirty="0"/>
+              <a:t/>
+            </a:r>
+          </a:p>
+          <a:p>
+            <a:r>
+              <a:rPr lang="zh-CN" dirty="0"/>
+              <a:t>节奏：讲 20 分钟 → 学员自己敲 40 分钟（不看答案）→ 对讲评自查 20 分钟 → 写作业 10 分钟。</a:t>
+            </a:r>
+          </a:p>
+        </p:txBody>
+      </p:sp>
+    </p:spTree>
+  </p:cSld>
+  <p:clrMapOvr>
+    <a:masterClrMapping/>
+  </p:clrMapOvr>
+</p:notes>
+</file>
+
+<file path=ppt/notesSlides/notesSlide3.xml><?xml version="1.0" encoding="utf-8"?>
+<p:notes xmlns:a="http://schemas.openxmlformats.org/drawingml/2006/main" xmlns:p="http://schemas.openxmlformats.org/presentationml/2006/main" xmlns:r="http://schemas.openxmlformats.org/officeDocument/2006/relationships">
+  <p:cSld>
+    <p:spTree>
+      <p:nvGrpSpPr>
+        <p:cNvPr id="1" name=""/>
+        <p:cNvGrpSpPr/>
+        <p:nvPr/>
+      </p:nvGrpSpPr>
+      <p:grpSpPr>
+        <a:xfrm>
+          <a:off x="0" y="0"/>
+          <a:ext cx="0" cy="0"/>
+          <a:chOff x="0" y="0"/>
+          <a:chExt cx="0" cy="0"/>
+        </a:xfrm>
+      </p:grpSpPr>
+      <p:sp>
+        <p:nvSpPr>
+          <p:cNvPr id="2" name="讲课提示"/>
+          <p:cNvSpPr txBox="1"/>
+          <p:nvPr/>
+        </p:nvSpPr>
+        <p:spPr>
+          <a:xfrm>
+            <a:off x="457200" y="457200"/>
+            <a:ext cx="6858000" cy="4800600"/>
+          </a:xfrm>
+          <a:prstGeom prst="rect">
+            <a:avLst/>
+          </a:prstGeom>
+        </p:spPr>
+        <p:txBody>
+          <a:bodyPr wrap="square"/>
+          <a:lstStyle/>
+          <a:p>
+            <a:r>
+              <a:rPr lang="zh-CN" dirty="0"/>
+              <a:t>第 1 节 · 核心知识点：装好 Python 与 VS Code</a:t>
+            </a:r>
+          </a:p>
+          <a:p>
+            <a:r>
+              <a:rPr lang="zh-CN" dirty="0"/>
+              <a:t/>
+            </a:r>
+          </a:p>
+          <a:p>
+            <a:r>
+              <a:rPr lang="zh-CN" dirty="0"/>
+              <a:t>讲这一页时：先让学生说出上节课的结论，再逐块讲要点。</a:t>
+            </a:r>
+          </a:p>
+          <a:p>
+            <a:r>
+              <a:rPr lang="zh-CN" dirty="0"/>
+              <a:t>每讲完一块，问一句「这一步如果写错了，报错会长什么样？」——把错误提前讲。</a:t>
+            </a:r>
+          </a:p>
+          <a:p>
+            <a:r>
+              <a:rPr lang="zh-CN" dirty="0"/>
+              <a:t/>
+            </a:r>
+          </a:p>
+          <a:p>
+            <a:r>
+              <a:rPr lang="zh-CN" dirty="0"/>
+              <a:t>本节目标：知道解释器是什么，能新建并运行第一个脚本</a:t>
+            </a:r>
+          </a:p>
+          <a:p>
+            <a:r>
+              <a:rPr lang="zh-CN" dirty="0"/>
+              <a:t/>
+            </a:r>
+          </a:p>
+          <a:p>
+            <a:r>
+              <a:rPr lang="zh-CN" dirty="0"/>
+              <a:t>看不到懂的地方，回讲义对应小节读一遍，再回来对着这页复述一次——能讲出来才算真懂。</a:t>
+            </a:r>
+          </a:p>
+        </p:txBody>
+      </p:sp>
+    </p:spTree>
+  </p:cSld>
+  <p:clrMapOvr>
+    <a:masterClrMapping/>
+  </p:clrMapOvr>
+</p:notes>
+</file>
+
+<file path=ppt/notesSlides/notesSlide4.xml><?xml version="1.0" encoding="utf-8"?>
+<p:notes xmlns:a="http://schemas.openxmlformats.org/drawingml/2006/main" xmlns:p="http://schemas.openxmlformats.org/presentationml/2006/main" xmlns:r="http://schemas.openxmlformats.org/officeDocument/2006/relationships">
+  <p:cSld>
+    <p:spTree>
+      <p:nvGrpSpPr>
+        <p:cNvPr id="1" name=""/>
+        <p:cNvGrpSpPr/>
+        <p:nvPr/>
+      </p:nvGrpSpPr>
+      <p:grpSpPr>
+        <a:xfrm>
+          <a:off x="0" y="0"/>
+          <a:ext cx="0" cy="0"/>
+          <a:chOff x="0" y="0"/>
+          <a:chExt cx="0" cy="0"/>
+        </a:xfrm>
+      </p:grpSpPr>
+      <p:sp>
+        <p:nvSpPr>
+          <p:cNvPr id="2" name="讲课提示"/>
+          <p:cNvSpPr txBox="1"/>
+          <p:nvPr/>
+        </p:nvSpPr>
+        <p:spPr>
+          <a:xfrm>
+            <a:off x="457200" y="457200"/>
+            <a:ext cx="6858000" cy="4800600"/>
+          </a:xfrm>
+          <a:prstGeom prst="rect">
+            <a:avLst/>
+          </a:prstGeom>
+        </p:spPr>
+        <p:txBody>
+          <a:bodyPr wrap="square"/>
+          <a:lstStyle/>
+          <a:p>
+            <a:r>
+              <a:rPr lang="zh-CN" dirty="0"/>
+              <a:t>第 2 节 · 第一个报错与 Git 拍快照</a:t>
+            </a:r>
+          </a:p>
+          <a:p>
+            <a:r>
+              <a:rPr lang="zh-CN" dirty="0"/>
+              <a:t>单元 0 · 环境与工具链 · W0</a:t>
+            </a:r>
+          </a:p>
+          <a:p>
+            <a:r>
+              <a:rPr lang="zh-CN" dirty="0"/>
+              <a:t/>
+            </a:r>
+          </a:p>
+          <a:p>
+            <a:r>
+              <a:rPr lang="zh-CN" dirty="0"/>
+              <a:t>学习目标：会读 traceback；能用 git 给代码拍快照并恢复</a:t>
+            </a:r>
+          </a:p>
+          <a:p>
+            <a:r>
+              <a:rPr lang="zh-CN" dirty="0"/>
+              <a:t/>
+            </a:r>
+          </a:p>
+          <a:p>
+            <a:r>
+              <a:rPr lang="zh-CN" dirty="0"/>
+              <a:t>课堂实操（40 分钟，不看答案）：</a:t>
+            </a:r>
+          </a:p>
+          <a:p>
+            <a:r>
+              <a:rPr lang="zh-CN" dirty="0"/>
+              <a:t>· 故意触发 3 种报错并读懂 traceback</a:t>
+            </a:r>
+          </a:p>
+          <a:p>
+            <a:r>
+              <a:rPr lang="zh-CN" dirty="0"/>
+              <a:t>· git init / add / commit 走一遍</a:t>
+            </a:r>
+          </a:p>
+          <a:p>
+            <a:r>
+              <a:rPr lang="zh-CN" dirty="0"/>
+              <a:t>· 故意删掉文件，用 git checkout 恢复</a:t>
+            </a:r>
+          </a:p>
+          <a:p>
+            <a:r>
+              <a:rPr lang="zh-CN" dirty="0"/>
+              <a:t/>
+            </a:r>
+          </a:p>
+          <a:p>
+            <a:r>
+              <a:rPr lang="zh-CN" dirty="0"/>
+              <a:t>课后作业：</a:t>
+            </a:r>
+          </a:p>
+          <a:p>
+            <a:r>
+              <a:rPr lang="zh-CN" dirty="0"/>
+              <a:t>· 完成动手练习 0-1 ~ 0-5</a:t>
+            </a:r>
+          </a:p>
+          <a:p>
+            <a:r>
+              <a:rPr lang="zh-CN" dirty="0"/>
+              <a:t/>
+            </a:r>
+          </a:p>
+          <a:p>
+            <a:r>
+              <a:rPr lang="zh-CN" dirty="0"/>
+              <a:t>节奏：讲 20 分钟 → 学员自己敲 40 分钟（不看答案）→ 对讲评自查 20 分钟 → 写作业 10 分钟。</a:t>
+            </a:r>
+          </a:p>
+        </p:txBody>
+      </p:sp>
+    </p:spTree>
+  </p:cSld>
+  <p:clrMapOvr>
+    <a:masterClrMapping/>
+  </p:clrMapOvr>
+</p:notes>
+</file>
+
+<file path=ppt/notesSlides/notesSlide5.xml><?xml version="1.0" encoding="utf-8"?>
+<p:notes xmlns:a="http://schemas.openxmlformats.org/drawingml/2006/main" xmlns:p="http://schemas.openxmlformats.org/presentationml/2006/main" xmlns:r="http://schemas.openxmlformats.org/officeDocument/2006/relationships">
+  <p:cSld>
+    <p:spTree>
+      <p:nvGrpSpPr>
+        <p:cNvPr id="1" name=""/>
+        <p:cNvGrpSpPr/>
+        <p:nvPr/>
+      </p:nvGrpSpPr>
+      <p:grpSpPr>
+        <a:xfrm>
+          <a:off x="0" y="0"/>
+          <a:ext cx="0" cy="0"/>
+          <a:chOff x="0" y="0"/>
+          <a:chExt cx="0" cy="0"/>
+        </a:xfrm>
+      </p:grpSpPr>
+      <p:sp>
+        <p:nvSpPr>
+          <p:cNvPr id="2" name="讲课提示"/>
+          <p:cNvSpPr txBox="1"/>
+          <p:nvPr/>
+        </p:nvSpPr>
+        <p:spPr>
+          <a:xfrm>
+            <a:off x="457200" y="457200"/>
+            <a:ext cx="6858000" cy="4800600"/>
+          </a:xfrm>
+          <a:prstGeom prst="rect">
+            <a:avLst/>
+          </a:prstGeom>
+        </p:spPr>
+        <p:txBody>
+          <a:bodyPr wrap="square"/>
+          <a:lstStyle/>
+          <a:p>
+            <a:r>
+              <a:rPr lang="zh-CN" dirty="0"/>
+              <a:t>第 2 节 · 核心知识点：第一个报错与 Git 拍快照</a:t>
+            </a:r>
+          </a:p>
+          <a:p>
+            <a:r>
+              <a:rPr lang="zh-CN" dirty="0"/>
+              <a:t/>
+            </a:r>
+          </a:p>
+          <a:p>
+            <a:r>
+              <a:rPr lang="zh-CN" dirty="0"/>
+              <a:t>讲这一页时：先让学生说出上节课的结论，再逐块讲要点。</a:t>
+            </a:r>
+          </a:p>
+          <a:p>
+            <a:r>
+              <a:rPr lang="zh-CN" dirty="0"/>
+              <a:t>每讲完一块，问一句「这一步如果写错了，报错会长什么样？」——把错误提前讲。</a:t>
+            </a:r>
+          </a:p>
+          <a:p>
+            <a:r>
+              <a:rPr lang="zh-CN" dirty="0"/>
+              <a:t/>
+            </a:r>
+          </a:p>
+          <a:p>
+            <a:r>
+              <a:rPr lang="zh-CN" dirty="0"/>
+              <a:t>本节目标：会读 traceback；能用 git 给代码拍快照并恢复</a:t>
+            </a:r>
+          </a:p>
+          <a:p>
+            <a:r>
+              <a:rPr lang="zh-CN" dirty="0"/>
+              <a:t/>
+            </a:r>
+          </a:p>
+          <a:p>
+            <a:r>
+              <a:rPr lang="zh-CN" dirty="0"/>
+              <a:t>看不到懂的地方，回讲义对应小节读一遍，再回来对着这页复述一次——能讲出来才算真懂。</a:t>
+            </a:r>
+          </a:p>
+        </p:txBody>
+      </p:sp>
+    </p:spTree>
+  </p:cSld>
+  <p:clrMapOvr>
+    <a:masterClrMapping/>
+  </p:clrMapOvr>
+</p:notes>
+</file>
+
+<file path=ppt/notesSlides/notesSlide6.xml><?xml version="1.0" encoding="utf-8"?>
+<p:notes xmlns:a="http://schemas.openxmlformats.org/drawingml/2006/main" xmlns:p="http://schemas.openxmlformats.org/presentationml/2006/main" xmlns:r="http://schemas.openxmlformats.org/officeDocument/2006/relationships">
+  <p:cSld>
+    <p:spTree>
+      <p:nvGrpSpPr>
+        <p:cNvPr id="1" name=""/>
+        <p:cNvGrpSpPr/>
+        <p:nvPr/>
+      </p:nvGrpSpPr>
+      <p:grpSpPr>
+        <a:xfrm>
+          <a:off x="0" y="0"/>
+          <a:ext cx="0" cy="0"/>
+          <a:chOff x="0" y="0"/>
+          <a:chExt cx="0" cy="0"/>
+        </a:xfrm>
+      </p:grpSpPr>
+      <p:sp>
+        <p:nvSpPr>
+          <p:cNvPr id="2" name="讲课提示"/>
+          <p:cNvSpPr txBox="1"/>
+          <p:nvPr/>
+        </p:nvSpPr>
+        <p:spPr>
+          <a:xfrm>
+            <a:off x="457200" y="457200"/>
+            <a:ext cx="6858000" cy="4800600"/>
+          </a:xfrm>
+          <a:prstGeom prst="rect">
+            <a:avLst/>
+          </a:prstGeom>
+        </p:spPr>
+        <p:txBody>
+          <a:bodyPr wrap="square"/>
+          <a:lstStyle/>
+          <a:p>
+            <a:r>
+              <a:rPr lang="zh-CN" dirty="0"/>
+              <a:t>第 3 节 · 目录结构、print 与注释</a:t>
+            </a:r>
+          </a:p>
+          <a:p>
+            <a:r>
+              <a:rPr lang="zh-CN" dirty="0"/>
+              <a:t>单元 0 · 环境与工具链 · W0</a:t>
+            </a:r>
+          </a:p>
+          <a:p>
+            <a:r>
+              <a:rPr lang="zh-CN" dirty="0"/>
+              <a:t/>
+            </a:r>
+          </a:p>
+          <a:p>
+            <a:r>
+              <a:rPr lang="zh-CN" dirty="0"/>
+              <a:t>学习目标：掌握 print 的 sep / end、f-string 与注释规范</a:t>
+            </a:r>
+          </a:p>
+          <a:p>
+            <a:r>
+              <a:rPr lang="zh-CN" dirty="0"/>
+              <a:t/>
+            </a:r>
+          </a:p>
+          <a:p>
+            <a:r>
+              <a:rPr lang="zh-CN" dirty="0"/>
+              <a:t>课堂实操（40 分钟，不看答案）：</a:t>
+            </a:r>
+          </a:p>
+          <a:p>
+            <a:r>
+              <a:rPr lang="zh-CN" dirty="0"/>
+              <a:t>· 修改示例 4 的 sep 和 end，观察输出变化</a:t>
+            </a:r>
+          </a:p>
+          <a:p>
+            <a:r>
+              <a:rPr lang="zh-CN" dirty="0"/>
+              <a:t>· 用 f-string 输出自我介绍</a:t>
+            </a:r>
+          </a:p>
+          <a:p>
+            <a:r>
+              <a:rPr lang="zh-CN" dirty="0"/>
+              <a:t>· 把 hello.py 写成有注释的规范版本</a:t>
+            </a:r>
+          </a:p>
+          <a:p>
+            <a:r>
+              <a:rPr lang="zh-CN" dirty="0"/>
+              <a:t/>
+            </a:r>
+          </a:p>
+          <a:p>
+            <a:r>
+              <a:rPr lang="zh-CN" dirty="0"/>
+              <a:t>课后作业：</a:t>
+            </a:r>
+          </a:p>
+          <a:p>
+            <a:r>
+              <a:rPr lang="zh-CN" dirty="0"/>
+              <a:t>· 完成动手练习进阶档 0-6 ~ 0-8</a:t>
+            </a:r>
+          </a:p>
+          <a:p>
+            <a:r>
+              <a:rPr lang="zh-CN" dirty="0"/>
+              <a:t/>
+            </a:r>
+          </a:p>
+          <a:p>
+            <a:r>
+              <a:rPr lang="zh-CN" dirty="0"/>
+              <a:t>节奏：讲 20 分钟 → 学员自己敲 40 分钟（不看答案）→ 对讲评自查 20 分钟 → 写作业 10 分钟。</a:t>
+            </a:r>
+          </a:p>
+        </p:txBody>
+      </p:sp>
+    </p:spTree>
+  </p:cSld>
+  <p:clrMapOvr>
+    <a:masterClrMapping/>
+  </p:clrMapOvr>
+</p:notes>
+</file>
+
+<file path=ppt/notesSlides/notesSlide7.xml><?xml version="1.0" encoding="utf-8"?>
+<p:notes xmlns:a="http://schemas.openxmlformats.org/drawingml/2006/main" xmlns:p="http://schemas.openxmlformats.org/presentationml/2006/main" xmlns:r="http://schemas.openxmlformats.org/officeDocument/2006/relationships">
+  <p:cSld>
+    <p:spTree>
+      <p:nvGrpSpPr>
+        <p:cNvPr id="1" name=""/>
+        <p:cNvGrpSpPr/>
+        <p:nvPr/>
+      </p:nvGrpSpPr>
+      <p:grpSpPr>
+        <a:xfrm>
+          <a:off x="0" y="0"/>
+          <a:ext cx="0" cy="0"/>
+          <a:chOff x="0" y="0"/>
+          <a:chExt cx="0" cy="0"/>
+        </a:xfrm>
+      </p:grpSpPr>
+      <p:sp>
+        <p:nvSpPr>
+          <p:cNvPr id="2" name="讲课提示"/>
+          <p:cNvSpPr txBox="1"/>
+          <p:nvPr/>
+        </p:nvSpPr>
+        <p:spPr>
+          <a:xfrm>
+            <a:off x="457200" y="457200"/>
+            <a:ext cx="6858000" cy="4800600"/>
+          </a:xfrm>
+          <a:prstGeom prst="rect">
+            <a:avLst/>
+          </a:prstGeom>
+        </p:spPr>
+        <p:txBody>
+          <a:bodyPr wrap="square"/>
+          <a:lstStyle/>
+          <a:p>
+            <a:r>
+              <a:rPr lang="zh-CN" dirty="0"/>
+              <a:t>第 3 节 · 核心知识点：目录结构、print 与注释</a:t>
+            </a:r>
+          </a:p>
+          <a:p>
+            <a:r>
+              <a:rPr lang="zh-CN" dirty="0"/>
+              <a:t/>
+            </a:r>
+          </a:p>
+          <a:p>
+            <a:r>
+              <a:rPr lang="zh-CN" dirty="0"/>
+              <a:t>讲这一页时：先让学生说出上节课的结论，再逐块讲要点。</a:t>
+            </a:r>
+          </a:p>
+          <a:p>
+            <a:r>
+              <a:rPr lang="zh-CN" dirty="0"/>
+              <a:t>每讲完一块，问一句「这一步如果写错了，报错会长什么样？」——把错误提前讲。</a:t>
+            </a:r>
+          </a:p>
+          <a:p>
+            <a:r>
+              <a:rPr lang="zh-CN" dirty="0"/>
+              <a:t/>
+            </a:r>
+          </a:p>
+          <a:p>
+            <a:r>
+              <a:rPr lang="zh-CN" dirty="0"/>
+              <a:t>本节目标：掌握 print 的 sep / end、f-string 与注释规范</a:t>
+            </a:r>
+          </a:p>
+          <a:p>
+            <a:r>
+              <a:rPr lang="zh-CN" dirty="0"/>
+              <a:t/>
+            </a:r>
+          </a:p>
+          <a:p>
+            <a:r>
+              <a:rPr lang="zh-CN" dirty="0"/>
+              <a:t>看不到懂的地方，回讲义对应小节读一遍，再回来对着这页复述一次——能讲出来才算真懂。</a:t>
+            </a:r>
+          </a:p>
+        </p:txBody>
+      </p:sp>
+    </p:spTree>
+  </p:cSld>
+  <p:clrMapOvr>
+    <a:masterClrMapping/>
+  </p:clrMapOvr>
+</p:notes>
+</file>
+
+<file path=ppt/notesSlides/notesSlide8.xml><?xml version="1.0" encoding="utf-8"?>
+<p:notes xmlns:a="http://schemas.openxmlformats.org/drawingml/2006/main" xmlns:p="http://schemas.openxmlformats.org/presentationml/2006/main" xmlns:r="http://schemas.openxmlformats.org/officeDocument/2006/relationships">
+  <p:cSld>
+    <p:spTree>
+      <p:nvGrpSpPr>
+        <p:cNvPr id="1" name=""/>
+        <p:cNvGrpSpPr/>
+        <p:nvPr/>
+      </p:nvGrpSpPr>
+      <p:grpSpPr>
+        <a:xfrm>
+          <a:off x="0" y="0"/>
+          <a:ext cx="0" cy="0"/>
+          <a:chOff x="0" y="0"/>
+          <a:chExt cx="0" cy="0"/>
+        </a:xfrm>
+      </p:grpSpPr>
+      <p:sp>
+        <p:nvSpPr>
+          <p:cNvPr id="2" name="讲课提示"/>
+          <p:cNvSpPr txBox="1"/>
+          <p:nvPr/>
+        </p:nvSpPr>
+        <p:spPr>
+          <a:xfrm>
+            <a:off x="457200" y="457200"/>
+            <a:ext cx="6858000" cy="4800600"/>
+          </a:xfrm>
+          <a:prstGeom prst="rect">
+            <a:avLst/>
+          </a:prstGeom>
+        </p:spPr>
+        <p:txBody>
+          <a:bodyPr wrap="square"/>
+          <a:lstStyle/>
+          <a:p>
+            <a:r>
+              <a:rPr lang="zh-CN" dirty="0"/>
+              <a:t>第 4 节 · 动手实战与答案讲评</a:t>
+            </a:r>
+          </a:p>
+          <a:p>
+            <a:r>
+              <a:rPr lang="zh-CN" dirty="0"/>
+              <a:t>单元 0 · 环境与工具链 · W0</a:t>
+            </a:r>
+          </a:p>
+          <a:p>
+            <a:r>
+              <a:rPr lang="zh-CN" dirty="0"/>
+              <a:t/>
+            </a:r>
+          </a:p>
+          <a:p>
+            <a:r>
+              <a:rPr lang="zh-CN" dirty="0"/>
+              <a:t>学习目标：独立完成单元 0 全部练习，并能对照答案自查</a:t>
+            </a:r>
+          </a:p>
+          <a:p>
+            <a:r>
+              <a:rPr lang="zh-CN" dirty="0"/>
+              <a:t/>
+            </a:r>
+          </a:p>
+          <a:p>
+            <a:r>
+              <a:rPr lang="zh-CN" dirty="0"/>
+              <a:t>课堂实操（40 分钟，不看答案）：</a:t>
+            </a:r>
+          </a:p>
+          <a:p>
+            <a:r>
+              <a:rPr lang="zh-CN" dirty="0"/>
+              <a:t>· 限时 20 分钟独立完成基础档</a:t>
+            </a:r>
+          </a:p>
+          <a:p>
+            <a:r>
+              <a:rPr lang="zh-CN" dirty="0"/>
+              <a:t>· 逐题对照参考答案，错的当场重跑</a:t>
+            </a:r>
+          </a:p>
+          <a:p>
+            <a:r>
+              <a:rPr lang="zh-CN" dirty="0"/>
+              <a:t/>
+            </a:r>
+          </a:p>
+          <a:p>
+            <a:r>
+              <a:rPr lang="zh-CN" dirty="0"/>
+              <a:t>课后作业：</a:t>
+            </a:r>
+          </a:p>
+          <a:p>
+            <a:r>
+              <a:rPr lang="zh-CN" dirty="0"/>
+              <a:t>· 产出：可运行的 hello.py + 首次 git 提交</a:t>
+            </a:r>
+          </a:p>
+          <a:p>
+            <a:r>
+              <a:rPr lang="zh-CN" dirty="0"/>
+              <a:t/>
+            </a:r>
+          </a:p>
+          <a:p>
+            <a:r>
+              <a:rPr lang="zh-CN" dirty="0"/>
+              <a:t>节奏：讲 20 分钟 → 学员自己敲 40 分钟（不看答案）→ 对讲评自查 20 分钟 → 写作业 10 分钟。</a:t>
+            </a:r>
+          </a:p>
+        </p:txBody>
+      </p:sp>
+    </p:spTree>
+  </p:cSld>
+  <p:clrMapOvr>
+    <a:masterClrMapping/>
+  </p:clrMapOvr>
+</p:notes>
+</file>
+
+<file path=ppt/notesSlides/notesSlide9.xml><?xml version="1.0" encoding="utf-8"?>
+<p:notes xmlns:a="http://schemas.openxmlformats.org/drawingml/2006/main" xmlns:p="http://schemas.openxmlformats.org/presentationml/2006/main" xmlns:r="http://schemas.openxmlformats.org/officeDocument/2006/relationships">
+  <p:cSld>
+    <p:spTree>
+      <p:nvGrpSpPr>
+        <p:cNvPr id="1" name=""/>
+        <p:cNvGrpSpPr/>
+        <p:nvPr/>
+      </p:nvGrpSpPr>
+      <p:grpSpPr>
+        <a:xfrm>
+          <a:off x="0" y="0"/>
+          <a:ext cx="0" cy="0"/>
+          <a:chOff x="0" y="0"/>
+          <a:chExt cx="0" cy="0"/>
+        </a:xfrm>
+      </p:grpSpPr>
+      <p:sp>
+        <p:nvSpPr>
+          <p:cNvPr id="2" name="讲课提示"/>
+          <p:cNvSpPr txBox="1"/>
+          <p:nvPr/>
+        </p:nvSpPr>
+        <p:spPr>
+          <a:xfrm>
+            <a:off x="457200" y="457200"/>
+            <a:ext cx="6858000" cy="4800600"/>
+          </a:xfrm>
+          <a:prstGeom prst="rect">
+            <a:avLst/>
+          </a:prstGeom>
+        </p:spPr>
+        <p:txBody>
+          <a:bodyPr wrap="square"/>
+          <a:lstStyle/>
+          <a:p>
+            <a:r>
+              <a:rPr lang="zh-CN" dirty="0"/>
+              <a:t>第 4 节 · 核心知识点：动手实战与答案讲评</a:t>
+            </a:r>
+          </a:p>
+          <a:p>
+            <a:r>
+              <a:rPr lang="zh-CN" dirty="0"/>
+              <a:t/>
+            </a:r>
+          </a:p>
+          <a:p>
+            <a:r>
+              <a:rPr lang="zh-CN" dirty="0"/>
+              <a:t>讲这一页时：先让学生说出上节课的结论，再逐块讲要点。</a:t>
+            </a:r>
+          </a:p>
+          <a:p>
+            <a:r>
+              <a:rPr lang="zh-CN" dirty="0"/>
+              <a:t>每讲完一块，问一句「这一步如果写错了，报错会长什么样？」——把错误提前讲。</a:t>
+            </a:r>
+          </a:p>
+          <a:p>
+            <a:r>
+              <a:rPr lang="zh-CN" dirty="0"/>
+              <a:t/>
+            </a:r>
+          </a:p>
+          <a:p>
+            <a:r>
+              <a:rPr lang="zh-CN" dirty="0"/>
+              <a:t>本节目标：独立完成单元 0 全部练习，并能对照答案自查</a:t>
+            </a:r>
+          </a:p>
+          <a:p>
+            <a:r>
+              <a:rPr lang="zh-CN" dirty="0"/>
+              <a:t/>
+            </a:r>
+          </a:p>
+          <a:p>
+            <a:r>
+              <a:rPr lang="zh-CN" dirty="0"/>
+              <a:t>看不到懂的地方，回讲义对应小节读一遍，再回来对着这页复述一次——能讲出来才算真懂。</a:t>
+            </a:r>
+          </a:p>
+        </p:txBody>
+      </p:sp>
+    </p:spTree>
+  </p:cSld>
+  <p:clrMapOvr>
+    <a:masterClrMapping/>
+  </p:clrMapOvr>
+</p:notes>
 </file>
 
 <file path=ppt/slideLayouts/slideLayout1.xml><?xml version="1.0" encoding="utf-8"?>

--- a/python-course-ppt/逐节课件/Python讲授课件-单元00.pptx
+++ b/python-course-ppt/逐节课件/Python讲授课件-单元00.pptx
@@ -4835,7 +4835,7 @@
   <p:cSld>
     <p:spTree>
       <p:nvGrpSpPr>
-        <p:cNvPr id="81" name="" descr="&lt;Slide style={{ width: '1280px', height: '720px', backgroundColor: '#FAFCFE', padding: 0, position: 'relative', overflow: 'hidden' }}&gt;&#13;&#10;    &lt;Box style={{ position: 'absolute', left: 64, top: 36, width: '1152px', flexDirection: 'row', alignItems: 'center', gap: 12 }}&gt;&#13;&#10;        &lt;Box style={{ background: '#0E9B78', borderRadius: 5, padding: '3px 11px' }}&gt;&#13;&#10;            &lt;Text style={{ fontSize: 14, fontWeight: 'bold', color: '#FFFFFF' }}&gt;第 4 节&lt;/Text&gt;&#13;&#10;        &lt;/Box&gt;&#13;&#10;        &lt;Text style={{ fontSize: 30, fontWeight: 'bold', color: '#16232E' }}&gt;核心知识点&lt;/Text&gt;&#13;&#10;        &lt;Text style={{ fontSize: 15, color: '#5A6B7A', marginTop: 10 }}&gt;· 动手实战与答案讲评&lt;/Text&gt;&#13;&#10;    &lt;/Box&gt;&#13;&#10;    &lt;Box style={{ position: 'absolute', left: 0, top: 0, width: '1280px', height: '720px' }}&gt;&#13;&#10;        &lt;svg width='1280' height='720' viewBox='0 0 1280 720'&gt;&#13;&#10;            &lt;rect x='64' y='96' width='368' height='330' rx='12' fill='#FFFFFF' stroke='#D8E3EE' /&gt;&lt;rect x='64' y='96' width='368' height='4' rx='2' fill='#1F5FA8' /&gt;&lt;text x='82' y='130' fontSize='15.5' fontWeight='bold' fill='#1F5FA8' textAnchor='start' fontFamily='Microsoft YaHei'&gt;基础档&lt;/text&gt;&lt;text x='82' y='169.0' fontSize='13' fill='#3A4A58' textAnchor='start' fontFamily='Microsoft YaHei'&gt;· 练习 0-1【环境验证】&lt;/text&gt;&lt;text x='82' y='197.5' fontSize='13' fill='#3A4A58' textAnchor='start' fontFamily='Microsoft YaHei'&gt;· 练习 0-2【第一个变量】&lt;/text&gt;&lt;text x='82' y='226.0' fontSize='13' fill='#3A4A58' textAnchor='start' fontFamily='Microsoft YaHei'&gt;· 练习 0-3【f-string 自我介绍】&lt;/text&gt;&lt;rect x='468' y='96' width='368' height='330' rx='12' fill='#FFFFFF' stroke='#D8E3EE' /&gt;&lt;rect x='468' y='96' width='368' height='4' rx='2' fill='#1F5FA8' /&gt;&lt;text x='486' y='130' fontSize='15.5' fontWeight='bold' fill='#1F5FA8' textAnchor='start' fontFamily='Microsoft YaHei'&gt;进阶档&lt;/text&gt;&lt;text x='486' y='169.0' fontSize='13' fill='#3A4A58' textAnchor='start' fontFamily='Microsoft YaHei'&gt;· 练习 0-5🌐【第一个交互程序】&lt;/text&gt;&lt;text x='486' y='197.5' fontSize='13' fill='#3A4A58' textAnchor='start' fontFamily='Microsoft YaHei'&gt;· 练习 0-6【批量注释与规范】&lt;/text&gt;&lt;text x='486' y='226.0' fontSize='13' fill='#3A4A58' textAnchor='start' fontFamily='Microsoft YaHei'&gt;· 练习 0-7【错误修复】&lt;/text&gt;&lt;rect x='872' y='96' width='368' height='330' rx='12' fill='#FFFFFF' stroke='#D8E3EE' /&gt;&lt;rect x='872' y='96' width='368' height='4' rx='2' fill='#1F5FA8' /&gt;&lt;text x='890' y='130' fontSize='15.5' fontWeight='bold' fill='#1F5FA8' textAnchor='start' fontFamily='Microsoft YaHei'&gt;参考答案 0-5&lt;/text&gt;&lt;text x='890' y='169.0' fontSize='13' fill='#3A4A58' textAnchor='start' fontFamily='Microsoft YaHei'&gt;· 如果用户输入的是 abc，int(&quot;abc&quot;) 会报&lt;/text&gt;&lt;text x='890' y='188.5' fontSize='13' fill='#3A4A58' textAnchor='start' fontFamily='Microsoft YaHei'&gt;ValueError，这是正常的…&lt;/text&gt;&lt;rect x='64' y='574' width='1152' height='66' rx='12' fill='#EEF5FB' /&gt;&lt;text x='84' y='616' fontSize='14' fill='#243444' textAnchor='start' fontFamily='Microsoft YaHei'&gt;看不懂的地方先回讲义对应小节读一遍，再回来对着这页复述一次——能讲出来才算真懂。&lt;/text&gt;&#13;&#10;            &lt;text x='64' y='684' fontSize='13' fill='#8A9AAA' fontFamily='Microsoft YaHei'&gt;Python 讲授课件 · 逐节版&lt;/text&gt;&#13;&#10;            &lt;text x='1216' y='684' fontSize='13' fill='#8A9AAA' textAnchor='end' fontFamily='Microsoft YaHei'&gt;单元 0 · 第 4 节&lt;/text&gt;&#13;&#10;        &lt;/svg&gt;&#13;&#10;    &lt;/Box&gt;&#13;&#10;&lt;/Slide&gt;&#13;&#10;"/>
+        <p:cNvPr id="81" name="" descr="&lt;Slide style={{ width: '1280px', height: '720px', backgroundColor: '#FAFCFE', padding: 0, position: 'relative', overflow: 'hidden' }}&gt;&#13;&#10;    &lt;Box style={{ position: 'absolute', left: 64, top: 36, width: '1152px', flexDirection: 'row', alignItems: 'center', gap: 12 }}&gt;&#13;&#10;        &lt;Box style={{ background: '#0E9B78', borderRadius: 5, padding: '3px 11px' }}&gt;&#13;&#10;            &lt;Text style={{ fontSize: 14, fontWeight: 'bold', color: '#FFFFFF' }}&gt;第 4 节&lt;/Text&gt;&#13;&#10;        &lt;/Box&gt;&#13;&#10;        &lt;Text style={{ fontSize: 30, fontWeight: 'bold', color: '#16232E' }}&gt;核心知识点&lt;/Text&gt;&#13;&#10;        &lt;Text style={{ fontSize: 15, color: '#5A6B7A', marginTop: 10 }}&gt;· 动手实战与答案讲评&lt;/Text&gt;&#13;&#10;    &lt;/Box&gt;&#13;&#10;    &lt;Box style={{ position: 'absolute', left: 0, top: 0, width: '1280px', height: '720px' }}&gt;&#13;&#10;        &lt;svg width='1280' height='720' viewBox='0 0 1280 720'&gt;&#13;&#10;            &lt;rect x='64' y='96' width='368' height='330' rx='12' fill='#FFFFFF' stroke='#D8E3EE' /&gt;&lt;rect x='64' y='96' width='368' height='4' rx='2' fill='#1F5FA8' /&gt;&lt;text x='82' y='130' fontSize='15.5' fontWeight='bold' fill='#1F5FA8' textAnchor='start' fontFamily='Microsoft YaHei'&gt;基础档&lt;/text&gt;&lt;text x='82' y='169.0' fontSize='13' fill='#3A4A58' textAnchor='start' fontFamily='Microsoft YaHei'&gt;· 练习 0-1【环境验证】&lt;/text&gt;&lt;text x='82' y='197.5' fontSize='13' fill='#3A4A58' textAnchor='start' fontFamily='Microsoft YaHei'&gt;· 练习 0-2【第一个变量】&lt;/text&gt;&lt;text x='82' y='226.0' fontSize='13' fill='#3A4A58' textAnchor='start' fontFamily='Microsoft YaHei'&gt;· 练习 0-3【f-string 自我介绍】&lt;/text&gt;&lt;rect x='468' y='96' width='368' height='330' rx='12' fill='#FFFFFF' stroke='#D8E3EE' /&gt;&lt;rect x='468' y='96' width='368' height='4' rx='2' fill='#1F5FA8' /&gt;&lt;text x='486' y='130' fontSize='15.5' fontWeight='bold' fill='#1F5FA8' textAnchor='start' fontFamily='Microsoft YaHei'&gt;进阶档&lt;/text&gt;&lt;text x='486' y='169.0' fontSize='13' fill='#3A4A58' textAnchor='start' fontFamily='Microsoft YaHei'&gt;· 练习 0-5🌐【第一个交互程序】&lt;/text&gt;&lt;text x='486' y='197.5' fontSize='13' fill='#3A4A58' textAnchor='start' fontFamily='Microsoft YaHei'&gt;· 练习 0-6【批量注释与规范】&lt;/text&gt;&lt;text x='486' y='226.0' fontSize='13' fill='#3A4A58' textAnchor='start' fontFamily='Microsoft YaHei'&gt;· 练习 0-7【错误修复】&lt;/text&gt;&lt;rect x='872' y='96' width='368' height='330' rx='12' fill='#FFFFFF' stroke='#D8E3EE' /&gt;&lt;rect x='872' y='96' width='368' height='4' rx='2' fill='#1F5FA8' /&gt;&lt;text x='890' y='130' fontSize='15.5' fontWeight='bold' fill='#1F5FA8' textAnchor='start' fontFamily='Microsoft YaHei'&gt;参考答案 0-1&lt;/text&gt;&lt;text x='890' y='169.0' fontSize='13' fill='#3A4A58' textAnchor='start' fontFamily='Microsoft YaHei'&gt;· 如果是 Python 3.11.x 或更低 → 本课程要求&lt;/text&gt;&lt;text x='890' y='188.5' fontSize='13' fill='#3A4A58' textAnchor='start' fontFamily='Microsoft YaHei'&gt;3.12+（removeprefix…&lt;/text&gt;&lt;text x='890' y='217.0' fontSize='13' fill='#3A4A58' textAnchor='start' fontFamily='Microsoft YaHei'&gt;· 如果报 'python' 不是内部或外部命令 →&lt;/text&gt;&lt;text x='890' y='236.5' fontSize='13' fill='#3A4A58' textAnchor='start' fontFamily='Microsoft YaHei'&gt;装的时候没勾「Add Python to PATH」…&lt;/text&gt;&lt;text x='890' y='265.0' fontSize='13' fill='#3A4A58' textAnchor='start' fontFamily='Microsoft YaHei'&gt;· 如果输出的是 Python 2.7 → 你机器上有两套&lt;/text&gt;&lt;text x='890' y='284.5' fontSize='13' fill='#3A4A58' textAnchor='start' fontFamily='Microsoft YaHei'&gt;Python…&lt;/text&gt;&lt;rect x='64' y='574' width='1152' height='66' rx='12' fill='#EEF5FB' /&gt;&lt;text x='84' y='616' fontSize='14' fill='#243444' textAnchor='start' fontFamily='Microsoft YaHei'&gt;看不懂的地方先回讲义对应小节读一遍，再回来对着这页复述一次——能讲出来才算真懂。&lt;/text&gt;&#13;&#10;            &lt;text x='64' y='684' fontSize='13' fill='#8A9AAA' fontFamily='Microsoft YaHei'&gt;Python 讲授课件 · 逐节版&lt;/text&gt;&#13;&#10;            &lt;text x='1216' y='684' fontSize='13' fill='#8A9AAA' textAnchor='end' fontFamily='Microsoft YaHei'&gt;单元 0 · 第 4 节&lt;/text&gt;&#13;&#10;        &lt;/svg&gt;&#13;&#10;    &lt;/Box&gt;&#13;&#10;&lt;/Slide&gt;&#13;&#10;"/>
         <p:cNvGrpSpPr/>
         <p:nvPr/>
       </p:nvGrpSpPr>
